--- a/documentacion/fichas_curriculares/cdmx/CDMX-2025.pptx
+++ b/documentacion/fichas_curriculares/cdmx/CDMX-2025.pptx
@@ -2,12 +2,12 @@
 <file path=ppt/presentation.xml><?xml version="1.0" encoding="utf-8"?>
 <p:presentation xmlns:a="http://schemas.openxmlformats.org/drawingml/2006/main" xmlns:r="http://schemas.openxmlformats.org/officeDocument/2006/relationships" xmlns:p="http://schemas.openxmlformats.org/presentationml/2006/main" saveSubsetFonts="1">
   <p:sldMasterIdLst>
-    <p:sldMasterId id="2147483696" r:id="rId1"/>
+    <p:sldMasterId id="2147483708" r:id="rId1"/>
   </p:sldMasterIdLst>
   <p:sldIdLst>
     <p:sldId id="256" r:id="rId2"/>
   </p:sldIdLst>
-  <p:sldSz cx="16256000" cy="9144000"/>
+  <p:sldSz cx="9144000" cy="6858000" type="letter"/>
   <p:notesSz cx="7023100" cy="9309100"/>
   <p:defaultTextStyle>
     <a:defPPr>
@@ -141,21 +141,21 @@
         </p:nvSpPr>
         <p:spPr>
           <a:xfrm>
-            <a:off x="2032000" y="1496484"/>
-            <a:ext cx="12192000" cy="3183467"/>
+            <a:off x="685800" y="1122363"/>
+            <a:ext cx="7772400" cy="2387600"/>
           </a:xfrm>
         </p:spPr>
         <p:txBody>
           <a:bodyPr anchor="b"/>
           <a:lstStyle>
             <a:lvl1pPr algn="ctr">
-              <a:defRPr sz="8000"/>
+              <a:defRPr sz="6000"/>
             </a:lvl1pPr>
           </a:lstStyle>
           <a:p>
             <a:r>
-              <a:rPr lang="es-ES"/>
-              <a:t>Haga clic para modificar el estilo de título del patrón</a:t>
+              <a:rPr lang="es-MX"/>
+              <a:t>Haz clic para modificar el estilo de título del patrón</a:t>
             </a:r>
             <a:endParaRPr lang="en-US" dirty="0"/>
           </a:p>
@@ -173,8 +173,8 @@
         </p:nvSpPr>
         <p:spPr>
           <a:xfrm>
-            <a:off x="2032000" y="4802717"/>
-            <a:ext cx="12192000" cy="2207683"/>
+            <a:off x="1143000" y="3602038"/>
+            <a:ext cx="6858000" cy="1655762"/>
           </a:xfrm>
         </p:spPr>
         <p:txBody>
@@ -182,45 +182,45 @@
           <a:lstStyle>
             <a:lvl1pPr marL="0" indent="0" algn="ctr">
               <a:buNone/>
-              <a:defRPr sz="3200"/>
+              <a:defRPr sz="2400"/>
             </a:lvl1pPr>
-            <a:lvl2pPr marL="609585" indent="0" algn="ctr">
-              <a:buNone/>
-              <a:defRPr sz="2667"/>
+            <a:lvl2pPr marL="457200" indent="0" algn="ctr">
+              <a:buNone/>
+              <a:defRPr sz="2000"/>
             </a:lvl2pPr>
-            <a:lvl3pPr marL="1219170" indent="0" algn="ctr">
-              <a:buNone/>
-              <a:defRPr sz="2400"/>
+            <a:lvl3pPr marL="914400" indent="0" algn="ctr">
+              <a:buNone/>
+              <a:defRPr sz="1800"/>
             </a:lvl3pPr>
-            <a:lvl4pPr marL="1828754" indent="0" algn="ctr">
-              <a:buNone/>
-              <a:defRPr sz="2133"/>
+            <a:lvl4pPr marL="1371600" indent="0" algn="ctr">
+              <a:buNone/>
+              <a:defRPr sz="1600"/>
             </a:lvl4pPr>
-            <a:lvl5pPr marL="2438339" indent="0" algn="ctr">
-              <a:buNone/>
-              <a:defRPr sz="2133"/>
+            <a:lvl5pPr marL="1828800" indent="0" algn="ctr">
+              <a:buNone/>
+              <a:defRPr sz="1600"/>
             </a:lvl5pPr>
-            <a:lvl6pPr marL="3047924" indent="0" algn="ctr">
-              <a:buNone/>
-              <a:defRPr sz="2133"/>
+            <a:lvl6pPr marL="2286000" indent="0" algn="ctr">
+              <a:buNone/>
+              <a:defRPr sz="1600"/>
             </a:lvl6pPr>
-            <a:lvl7pPr marL="3657509" indent="0" algn="ctr">
-              <a:buNone/>
-              <a:defRPr sz="2133"/>
+            <a:lvl7pPr marL="2743200" indent="0" algn="ctr">
+              <a:buNone/>
+              <a:defRPr sz="1600"/>
             </a:lvl7pPr>
-            <a:lvl8pPr marL="4267093" indent="0" algn="ctr">
-              <a:buNone/>
-              <a:defRPr sz="2133"/>
+            <a:lvl8pPr marL="3200400" indent="0" algn="ctr">
+              <a:buNone/>
+              <a:defRPr sz="1600"/>
             </a:lvl8pPr>
-            <a:lvl9pPr marL="4876678" indent="0" algn="ctr">
-              <a:buNone/>
-              <a:defRPr sz="2133"/>
+            <a:lvl9pPr marL="3657600" indent="0" algn="ctr">
+              <a:buNone/>
+              <a:defRPr sz="1600"/>
             </a:lvl9pPr>
           </a:lstStyle>
           <a:p>
             <a:r>
-              <a:rPr lang="es-ES"/>
-              <a:t>Haga clic para modificar el estilo de subtítulo del patrón</a:t>
+              <a:rPr lang="es-MX"/>
+              <a:t>Haz clic para editar el estilo de subtítulo del patrón</a:t>
             </a:r>
             <a:endParaRPr lang="en-US" dirty="0"/>
           </a:p>
@@ -243,7 +243,7 @@
           <a:p>
             <a:fld id="{664CB750-BDA0-4B3C-9407-BAF21E562682}" type="datetimeFigureOut">
               <a:rPr lang="es-MX" smtClean="0"/>
-              <a:t>09/06/2025</a:t>
+              <a:t>17/06/2025</a:t>
             </a:fld>
             <a:endParaRPr lang="es-MX"/>
           </a:p>
@@ -294,7 +294,7 @@
     </p:spTree>
     <p:extLst>
       <p:ext uri="{BB962C8B-B14F-4D97-AF65-F5344CB8AC3E}">
-        <p14:creationId xmlns:p14="http://schemas.microsoft.com/office/powerpoint/2010/main" val="1613497966"/>
+        <p14:creationId xmlns:p14="http://schemas.microsoft.com/office/powerpoint/2010/main" val="1943981650"/>
       </p:ext>
     </p:extLst>
   </p:cSld>
@@ -337,8 +337,8 @@
           <a:lstStyle/>
           <a:p>
             <a:r>
-              <a:rPr lang="es-ES"/>
-              <a:t>Haga clic para modificar el estilo de título del patrón</a:t>
+              <a:rPr lang="es-MX"/>
+              <a:t>Haz clic para modificar el estilo de título del patrón</a:t>
             </a:r>
             <a:endParaRPr lang="en-US" dirty="0"/>
           </a:p>
@@ -361,35 +361,35 @@
           <a:p>
             <a:pPr lvl="0"/>
             <a:r>
-              <a:rPr lang="es-ES"/>
+              <a:rPr lang="es-MX"/>
               <a:t>Haga clic para modificar los estilos de texto del patrón</a:t>
             </a:r>
           </a:p>
           <a:p>
             <a:pPr lvl="1"/>
             <a:r>
-              <a:rPr lang="es-ES"/>
+              <a:rPr lang="es-MX"/>
               <a:t>Segundo nivel</a:t>
             </a:r>
           </a:p>
           <a:p>
             <a:pPr lvl="2"/>
             <a:r>
-              <a:rPr lang="es-ES"/>
+              <a:rPr lang="es-MX"/>
               <a:t>Tercer nivel</a:t>
             </a:r>
           </a:p>
           <a:p>
             <a:pPr lvl="3"/>
             <a:r>
-              <a:rPr lang="es-ES"/>
+              <a:rPr lang="es-MX"/>
               <a:t>Cuarto nivel</a:t>
             </a:r>
           </a:p>
           <a:p>
             <a:pPr lvl="4"/>
             <a:r>
-              <a:rPr lang="es-ES"/>
+              <a:rPr lang="es-MX"/>
               <a:t>Quinto nivel</a:t>
             </a:r>
             <a:endParaRPr lang="en-US" dirty="0"/>
@@ -413,7 +413,7 @@
           <a:p>
             <a:fld id="{664CB750-BDA0-4B3C-9407-BAF21E562682}" type="datetimeFigureOut">
               <a:rPr lang="es-MX" smtClean="0"/>
-              <a:t>09/06/2025</a:t>
+              <a:t>17/06/2025</a:t>
             </a:fld>
             <a:endParaRPr lang="es-MX"/>
           </a:p>
@@ -464,7 +464,7 @@
     </p:spTree>
     <p:extLst>
       <p:ext uri="{BB962C8B-B14F-4D97-AF65-F5344CB8AC3E}">
-        <p14:creationId xmlns:p14="http://schemas.microsoft.com/office/powerpoint/2010/main" val="2564884848"/>
+        <p14:creationId xmlns:p14="http://schemas.microsoft.com/office/powerpoint/2010/main" val="94832619"/>
       </p:ext>
     </p:extLst>
   </p:cSld>
@@ -503,8 +503,8 @@
         </p:nvSpPr>
         <p:spPr>
           <a:xfrm>
-            <a:off x="11633200" y="486834"/>
-            <a:ext cx="3505200" cy="7749117"/>
+            <a:off x="6543675" y="365125"/>
+            <a:ext cx="1971675" cy="5811838"/>
           </a:xfrm>
         </p:spPr>
         <p:txBody>
@@ -512,8 +512,8 @@
           <a:lstStyle/>
           <a:p>
             <a:r>
-              <a:rPr lang="es-ES"/>
-              <a:t>Haga clic para modificar el estilo de título del patrón</a:t>
+              <a:rPr lang="es-MX"/>
+              <a:t>Haz clic para modificar el estilo de título del patrón</a:t>
             </a:r>
             <a:endParaRPr lang="en-US" dirty="0"/>
           </a:p>
@@ -531,8 +531,8 @@
         </p:nvSpPr>
         <p:spPr>
           <a:xfrm>
-            <a:off x="1117600" y="486834"/>
-            <a:ext cx="10312400" cy="7749117"/>
+            <a:off x="628650" y="365125"/>
+            <a:ext cx="5800725" cy="5811838"/>
           </a:xfrm>
         </p:spPr>
         <p:txBody>
@@ -541,35 +541,35 @@
           <a:p>
             <a:pPr lvl="0"/>
             <a:r>
-              <a:rPr lang="es-ES"/>
+              <a:rPr lang="es-MX"/>
               <a:t>Haga clic para modificar los estilos de texto del patrón</a:t>
             </a:r>
           </a:p>
           <a:p>
             <a:pPr lvl="1"/>
             <a:r>
-              <a:rPr lang="es-ES"/>
+              <a:rPr lang="es-MX"/>
               <a:t>Segundo nivel</a:t>
             </a:r>
           </a:p>
           <a:p>
             <a:pPr lvl="2"/>
             <a:r>
-              <a:rPr lang="es-ES"/>
+              <a:rPr lang="es-MX"/>
               <a:t>Tercer nivel</a:t>
             </a:r>
           </a:p>
           <a:p>
             <a:pPr lvl="3"/>
             <a:r>
-              <a:rPr lang="es-ES"/>
+              <a:rPr lang="es-MX"/>
               <a:t>Cuarto nivel</a:t>
             </a:r>
           </a:p>
           <a:p>
             <a:pPr lvl="4"/>
             <a:r>
-              <a:rPr lang="es-ES"/>
+              <a:rPr lang="es-MX"/>
               <a:t>Quinto nivel</a:t>
             </a:r>
             <a:endParaRPr lang="en-US" dirty="0"/>
@@ -593,7 +593,7 @@
           <a:p>
             <a:fld id="{664CB750-BDA0-4B3C-9407-BAF21E562682}" type="datetimeFigureOut">
               <a:rPr lang="es-MX" smtClean="0"/>
-              <a:t>09/06/2025</a:t>
+              <a:t>17/06/2025</a:t>
             </a:fld>
             <a:endParaRPr lang="es-MX"/>
           </a:p>
@@ -644,7 +644,7 @@
     </p:spTree>
     <p:extLst>
       <p:ext uri="{BB962C8B-B14F-4D97-AF65-F5344CB8AC3E}">
-        <p14:creationId xmlns:p14="http://schemas.microsoft.com/office/powerpoint/2010/main" val="4034219924"/>
+        <p14:creationId xmlns:p14="http://schemas.microsoft.com/office/powerpoint/2010/main" val="136958027"/>
       </p:ext>
     </p:extLst>
   </p:cSld>
@@ -687,8 +687,8 @@
           <a:lstStyle/>
           <a:p>
             <a:r>
-              <a:rPr lang="es-ES"/>
-              <a:t>Haga clic para modificar el estilo de título del patrón</a:t>
+              <a:rPr lang="es-MX"/>
+              <a:t>Haz clic para modificar el estilo de título del patrón</a:t>
             </a:r>
             <a:endParaRPr lang="en-US" dirty="0"/>
           </a:p>
@@ -711,35 +711,35 @@
           <a:p>
             <a:pPr lvl="0"/>
             <a:r>
-              <a:rPr lang="es-ES"/>
+              <a:rPr lang="es-MX"/>
               <a:t>Haga clic para modificar los estilos de texto del patrón</a:t>
             </a:r>
           </a:p>
           <a:p>
             <a:pPr lvl="1"/>
             <a:r>
-              <a:rPr lang="es-ES"/>
+              <a:rPr lang="es-MX"/>
               <a:t>Segundo nivel</a:t>
             </a:r>
           </a:p>
           <a:p>
             <a:pPr lvl="2"/>
             <a:r>
-              <a:rPr lang="es-ES"/>
+              <a:rPr lang="es-MX"/>
               <a:t>Tercer nivel</a:t>
             </a:r>
           </a:p>
           <a:p>
             <a:pPr lvl="3"/>
             <a:r>
-              <a:rPr lang="es-ES"/>
+              <a:rPr lang="es-MX"/>
               <a:t>Cuarto nivel</a:t>
             </a:r>
           </a:p>
           <a:p>
             <a:pPr lvl="4"/>
             <a:r>
-              <a:rPr lang="es-ES"/>
+              <a:rPr lang="es-MX"/>
               <a:t>Quinto nivel</a:t>
             </a:r>
             <a:endParaRPr lang="en-US" dirty="0"/>
@@ -763,7 +763,7 @@
           <a:p>
             <a:fld id="{664CB750-BDA0-4B3C-9407-BAF21E562682}" type="datetimeFigureOut">
               <a:rPr lang="es-MX" smtClean="0"/>
-              <a:t>09/06/2025</a:t>
+              <a:t>17/06/2025</a:t>
             </a:fld>
             <a:endParaRPr lang="es-MX"/>
           </a:p>
@@ -814,7 +814,7 @@
     </p:spTree>
     <p:extLst>
       <p:ext uri="{BB962C8B-B14F-4D97-AF65-F5344CB8AC3E}">
-        <p14:creationId xmlns:p14="http://schemas.microsoft.com/office/powerpoint/2010/main" val="2674221241"/>
+        <p14:creationId xmlns:p14="http://schemas.microsoft.com/office/powerpoint/2010/main" val="2575148578"/>
       </p:ext>
     </p:extLst>
   </p:cSld>
@@ -853,21 +853,21 @@
         </p:nvSpPr>
         <p:spPr>
           <a:xfrm>
-            <a:off x="1109133" y="2279652"/>
-            <a:ext cx="14020800" cy="3803649"/>
+            <a:off x="623888" y="1709739"/>
+            <a:ext cx="7886700" cy="2852737"/>
           </a:xfrm>
         </p:spPr>
         <p:txBody>
           <a:bodyPr anchor="b"/>
           <a:lstStyle>
             <a:lvl1pPr>
-              <a:defRPr sz="8000"/>
+              <a:defRPr sz="6000"/>
             </a:lvl1pPr>
           </a:lstStyle>
           <a:p>
             <a:r>
-              <a:rPr lang="es-ES"/>
-              <a:t>Haga clic para modificar el estilo de título del patrón</a:t>
+              <a:rPr lang="es-MX"/>
+              <a:t>Haz clic para modificar el estilo de título del patrón</a:t>
             </a:r>
             <a:endParaRPr lang="en-US" dirty="0"/>
           </a:p>
@@ -885,8 +885,8 @@
         </p:nvSpPr>
         <p:spPr>
           <a:xfrm>
-            <a:off x="1109133" y="6119285"/>
-            <a:ext cx="14020800" cy="2000249"/>
+            <a:off x="623888" y="4589464"/>
+            <a:ext cx="7886700" cy="1500187"/>
           </a:xfrm>
         </p:spPr>
         <p:txBody>
@@ -894,99 +894,97 @@
           <a:lstStyle>
             <a:lvl1pPr marL="0" indent="0">
               <a:buNone/>
-              <a:defRPr sz="3200">
+              <a:defRPr sz="2400">
+                <a:solidFill>
+                  <a:schemeClr val="tx1"/>
+                </a:solidFill>
+              </a:defRPr>
+            </a:lvl1pPr>
+            <a:lvl2pPr marL="457200" indent="0">
+              <a:buNone/>
+              <a:defRPr sz="2000">
                 <a:solidFill>
                   <a:schemeClr val="tx1">
                     <a:tint val="75000"/>
                   </a:schemeClr>
                 </a:solidFill>
               </a:defRPr>
-            </a:lvl1pPr>
-            <a:lvl2pPr marL="609585" indent="0">
-              <a:buNone/>
-              <a:defRPr sz="2667">
+            </a:lvl2pPr>
+            <a:lvl3pPr marL="914400" indent="0">
+              <a:buNone/>
+              <a:defRPr sz="1800">
                 <a:solidFill>
                   <a:schemeClr val="tx1">
                     <a:tint val="75000"/>
                   </a:schemeClr>
                 </a:solidFill>
               </a:defRPr>
-            </a:lvl2pPr>
-            <a:lvl3pPr marL="1219170" indent="0">
-              <a:buNone/>
-              <a:defRPr sz="2400">
+            </a:lvl3pPr>
+            <a:lvl4pPr marL="1371600" indent="0">
+              <a:buNone/>
+              <a:defRPr sz="1600">
                 <a:solidFill>
                   <a:schemeClr val="tx1">
                     <a:tint val="75000"/>
                   </a:schemeClr>
                 </a:solidFill>
               </a:defRPr>
-            </a:lvl3pPr>
-            <a:lvl4pPr marL="1828754" indent="0">
-              <a:buNone/>
-              <a:defRPr sz="2133">
+            </a:lvl4pPr>
+            <a:lvl5pPr marL="1828800" indent="0">
+              <a:buNone/>
+              <a:defRPr sz="1600">
                 <a:solidFill>
                   <a:schemeClr val="tx1">
                     <a:tint val="75000"/>
                   </a:schemeClr>
                 </a:solidFill>
               </a:defRPr>
-            </a:lvl4pPr>
-            <a:lvl5pPr marL="2438339" indent="0">
-              <a:buNone/>
-              <a:defRPr sz="2133">
+            </a:lvl5pPr>
+            <a:lvl6pPr marL="2286000" indent="0">
+              <a:buNone/>
+              <a:defRPr sz="1600">
                 <a:solidFill>
                   <a:schemeClr val="tx1">
                     <a:tint val="75000"/>
                   </a:schemeClr>
                 </a:solidFill>
               </a:defRPr>
-            </a:lvl5pPr>
-            <a:lvl6pPr marL="3047924" indent="0">
-              <a:buNone/>
-              <a:defRPr sz="2133">
+            </a:lvl6pPr>
+            <a:lvl7pPr marL="2743200" indent="0">
+              <a:buNone/>
+              <a:defRPr sz="1600">
                 <a:solidFill>
                   <a:schemeClr val="tx1">
                     <a:tint val="75000"/>
                   </a:schemeClr>
                 </a:solidFill>
               </a:defRPr>
-            </a:lvl6pPr>
-            <a:lvl7pPr marL="3657509" indent="0">
-              <a:buNone/>
-              <a:defRPr sz="2133">
+            </a:lvl7pPr>
+            <a:lvl8pPr marL="3200400" indent="0">
+              <a:buNone/>
+              <a:defRPr sz="1600">
                 <a:solidFill>
                   <a:schemeClr val="tx1">
                     <a:tint val="75000"/>
                   </a:schemeClr>
                 </a:solidFill>
               </a:defRPr>
-            </a:lvl7pPr>
-            <a:lvl8pPr marL="4267093" indent="0">
-              <a:buNone/>
-              <a:defRPr sz="2133">
+            </a:lvl8pPr>
+            <a:lvl9pPr marL="3657600" indent="0">
+              <a:buNone/>
+              <a:defRPr sz="1600">
                 <a:solidFill>
                   <a:schemeClr val="tx1">
                     <a:tint val="75000"/>
                   </a:schemeClr>
                 </a:solidFill>
               </a:defRPr>
-            </a:lvl8pPr>
-            <a:lvl9pPr marL="4876678" indent="0">
-              <a:buNone/>
-              <a:defRPr sz="2133">
-                <a:solidFill>
-                  <a:schemeClr val="tx1">
-                    <a:tint val="75000"/>
-                  </a:schemeClr>
-                </a:solidFill>
-              </a:defRPr>
             </a:lvl9pPr>
           </a:lstStyle>
           <a:p>
             <a:pPr lvl="0"/>
             <a:r>
-              <a:rPr lang="es-ES"/>
+              <a:rPr lang="es-MX"/>
               <a:t>Haga clic para modificar los estilos de texto del patrón</a:t>
             </a:r>
           </a:p>
@@ -1009,7 +1007,7 @@
           <a:p>
             <a:fld id="{664CB750-BDA0-4B3C-9407-BAF21E562682}" type="datetimeFigureOut">
               <a:rPr lang="es-MX" smtClean="0"/>
-              <a:t>09/06/2025</a:t>
+              <a:t>17/06/2025</a:t>
             </a:fld>
             <a:endParaRPr lang="es-MX"/>
           </a:p>
@@ -1060,7 +1058,7 @@
     </p:spTree>
     <p:extLst>
       <p:ext uri="{BB962C8B-B14F-4D97-AF65-F5344CB8AC3E}">
-        <p14:creationId xmlns:p14="http://schemas.microsoft.com/office/powerpoint/2010/main" val="267959951"/>
+        <p14:creationId xmlns:p14="http://schemas.microsoft.com/office/powerpoint/2010/main" val="1439801334"/>
       </p:ext>
     </p:extLst>
   </p:cSld>
@@ -1103,8 +1101,8 @@
           <a:lstStyle/>
           <a:p>
             <a:r>
-              <a:rPr lang="es-ES"/>
-              <a:t>Haga clic para modificar el estilo de título del patrón</a:t>
+              <a:rPr lang="es-MX"/>
+              <a:t>Haz clic para modificar el estilo de título del patrón</a:t>
             </a:r>
             <a:endParaRPr lang="en-US" dirty="0"/>
           </a:p>
@@ -1122,8 +1120,8 @@
         </p:nvSpPr>
         <p:spPr>
           <a:xfrm>
-            <a:off x="1117600" y="2434167"/>
-            <a:ext cx="6908800" cy="5801784"/>
+            <a:off x="628650" y="1825625"/>
+            <a:ext cx="3886200" cy="4351338"/>
           </a:xfrm>
         </p:spPr>
         <p:txBody>
@@ -1132,35 +1130,35 @@
           <a:p>
             <a:pPr lvl="0"/>
             <a:r>
-              <a:rPr lang="es-ES"/>
+              <a:rPr lang="es-MX"/>
               <a:t>Haga clic para modificar los estilos de texto del patrón</a:t>
             </a:r>
           </a:p>
           <a:p>
             <a:pPr lvl="1"/>
             <a:r>
-              <a:rPr lang="es-ES"/>
+              <a:rPr lang="es-MX"/>
               <a:t>Segundo nivel</a:t>
             </a:r>
           </a:p>
           <a:p>
             <a:pPr lvl="2"/>
             <a:r>
-              <a:rPr lang="es-ES"/>
+              <a:rPr lang="es-MX"/>
               <a:t>Tercer nivel</a:t>
             </a:r>
           </a:p>
           <a:p>
             <a:pPr lvl="3"/>
             <a:r>
-              <a:rPr lang="es-ES"/>
+              <a:rPr lang="es-MX"/>
               <a:t>Cuarto nivel</a:t>
             </a:r>
           </a:p>
           <a:p>
             <a:pPr lvl="4"/>
             <a:r>
-              <a:rPr lang="es-ES"/>
+              <a:rPr lang="es-MX"/>
               <a:t>Quinto nivel</a:t>
             </a:r>
             <a:endParaRPr lang="en-US" dirty="0"/>
@@ -1179,8 +1177,8 @@
         </p:nvSpPr>
         <p:spPr>
           <a:xfrm>
-            <a:off x="8229600" y="2434167"/>
-            <a:ext cx="6908800" cy="5801784"/>
+            <a:off x="4629150" y="1825625"/>
+            <a:ext cx="3886200" cy="4351338"/>
           </a:xfrm>
         </p:spPr>
         <p:txBody>
@@ -1189,35 +1187,35 @@
           <a:p>
             <a:pPr lvl="0"/>
             <a:r>
-              <a:rPr lang="es-ES"/>
+              <a:rPr lang="es-MX"/>
               <a:t>Haga clic para modificar los estilos de texto del patrón</a:t>
             </a:r>
           </a:p>
           <a:p>
             <a:pPr lvl="1"/>
             <a:r>
-              <a:rPr lang="es-ES"/>
+              <a:rPr lang="es-MX"/>
               <a:t>Segundo nivel</a:t>
             </a:r>
           </a:p>
           <a:p>
             <a:pPr lvl="2"/>
             <a:r>
-              <a:rPr lang="es-ES"/>
+              <a:rPr lang="es-MX"/>
               <a:t>Tercer nivel</a:t>
             </a:r>
           </a:p>
           <a:p>
             <a:pPr lvl="3"/>
             <a:r>
-              <a:rPr lang="es-ES"/>
+              <a:rPr lang="es-MX"/>
               <a:t>Cuarto nivel</a:t>
             </a:r>
           </a:p>
           <a:p>
             <a:pPr lvl="4"/>
             <a:r>
-              <a:rPr lang="es-ES"/>
+              <a:rPr lang="es-MX"/>
               <a:t>Quinto nivel</a:t>
             </a:r>
             <a:endParaRPr lang="en-US" dirty="0"/>
@@ -1241,7 +1239,7 @@
           <a:p>
             <a:fld id="{664CB750-BDA0-4B3C-9407-BAF21E562682}" type="datetimeFigureOut">
               <a:rPr lang="es-MX" smtClean="0"/>
-              <a:t>09/06/2025</a:t>
+              <a:t>17/06/2025</a:t>
             </a:fld>
             <a:endParaRPr lang="es-MX"/>
           </a:p>
@@ -1292,7 +1290,7 @@
     </p:spTree>
     <p:extLst>
       <p:ext uri="{BB962C8B-B14F-4D97-AF65-F5344CB8AC3E}">
-        <p14:creationId xmlns:p14="http://schemas.microsoft.com/office/powerpoint/2010/main" val="1916828610"/>
+        <p14:creationId xmlns:p14="http://schemas.microsoft.com/office/powerpoint/2010/main" val="2033373593"/>
       </p:ext>
     </p:extLst>
   </p:cSld>
@@ -1331,8 +1329,8 @@
         </p:nvSpPr>
         <p:spPr>
           <a:xfrm>
-            <a:off x="1119717" y="486834"/>
-            <a:ext cx="14020800" cy="1767417"/>
+            <a:off x="629841" y="365126"/>
+            <a:ext cx="7886700" cy="1325563"/>
           </a:xfrm>
         </p:spPr>
         <p:txBody>
@@ -1340,8 +1338,8 @@
           <a:lstStyle/>
           <a:p>
             <a:r>
-              <a:rPr lang="es-ES"/>
-              <a:t>Haga clic para modificar el estilo de título del patrón</a:t>
+              <a:rPr lang="es-MX"/>
+              <a:t>Haz clic para modificar el estilo de título del patrón</a:t>
             </a:r>
             <a:endParaRPr lang="en-US" dirty="0"/>
           </a:p>
@@ -1359,8 +1357,8 @@
         </p:nvSpPr>
         <p:spPr>
           <a:xfrm>
-            <a:off x="1119718" y="2241551"/>
-            <a:ext cx="6877049" cy="1098549"/>
+            <a:off x="629842" y="1681163"/>
+            <a:ext cx="3868340" cy="823912"/>
           </a:xfrm>
         </p:spPr>
         <p:txBody>
@@ -1368,45 +1366,45 @@
           <a:lstStyle>
             <a:lvl1pPr marL="0" indent="0">
               <a:buNone/>
-              <a:defRPr sz="3200" b="1"/>
+              <a:defRPr sz="2400" b="1"/>
             </a:lvl1pPr>
-            <a:lvl2pPr marL="609585" indent="0">
-              <a:buNone/>
-              <a:defRPr sz="2667" b="1"/>
+            <a:lvl2pPr marL="457200" indent="0">
+              <a:buNone/>
+              <a:defRPr sz="2000" b="1"/>
             </a:lvl2pPr>
-            <a:lvl3pPr marL="1219170" indent="0">
-              <a:buNone/>
-              <a:defRPr sz="2400" b="1"/>
+            <a:lvl3pPr marL="914400" indent="0">
+              <a:buNone/>
+              <a:defRPr sz="1800" b="1"/>
             </a:lvl3pPr>
-            <a:lvl4pPr marL="1828754" indent="0">
-              <a:buNone/>
-              <a:defRPr sz="2133" b="1"/>
+            <a:lvl4pPr marL="1371600" indent="0">
+              <a:buNone/>
+              <a:defRPr sz="1600" b="1"/>
             </a:lvl4pPr>
-            <a:lvl5pPr marL="2438339" indent="0">
-              <a:buNone/>
-              <a:defRPr sz="2133" b="1"/>
+            <a:lvl5pPr marL="1828800" indent="0">
+              <a:buNone/>
+              <a:defRPr sz="1600" b="1"/>
             </a:lvl5pPr>
-            <a:lvl6pPr marL="3047924" indent="0">
-              <a:buNone/>
-              <a:defRPr sz="2133" b="1"/>
+            <a:lvl6pPr marL="2286000" indent="0">
+              <a:buNone/>
+              <a:defRPr sz="1600" b="1"/>
             </a:lvl6pPr>
-            <a:lvl7pPr marL="3657509" indent="0">
-              <a:buNone/>
-              <a:defRPr sz="2133" b="1"/>
+            <a:lvl7pPr marL="2743200" indent="0">
+              <a:buNone/>
+              <a:defRPr sz="1600" b="1"/>
             </a:lvl7pPr>
-            <a:lvl8pPr marL="4267093" indent="0">
-              <a:buNone/>
-              <a:defRPr sz="2133" b="1"/>
+            <a:lvl8pPr marL="3200400" indent="0">
+              <a:buNone/>
+              <a:defRPr sz="1600" b="1"/>
             </a:lvl8pPr>
-            <a:lvl9pPr marL="4876678" indent="0">
-              <a:buNone/>
-              <a:defRPr sz="2133" b="1"/>
+            <a:lvl9pPr marL="3657600" indent="0">
+              <a:buNone/>
+              <a:defRPr sz="1600" b="1"/>
             </a:lvl9pPr>
           </a:lstStyle>
           <a:p>
             <a:pPr lvl="0"/>
             <a:r>
-              <a:rPr lang="es-ES"/>
+              <a:rPr lang="es-MX"/>
               <a:t>Haga clic para modificar los estilos de texto del patrón</a:t>
             </a:r>
           </a:p>
@@ -1424,8 +1422,8 @@
         </p:nvSpPr>
         <p:spPr>
           <a:xfrm>
-            <a:off x="1119718" y="3340100"/>
-            <a:ext cx="6877049" cy="4912784"/>
+            <a:off x="629842" y="2505075"/>
+            <a:ext cx="3868340" cy="3684588"/>
           </a:xfrm>
         </p:spPr>
         <p:txBody>
@@ -1434,35 +1432,35 @@
           <a:p>
             <a:pPr lvl="0"/>
             <a:r>
-              <a:rPr lang="es-ES"/>
+              <a:rPr lang="es-MX"/>
               <a:t>Haga clic para modificar los estilos de texto del patrón</a:t>
             </a:r>
           </a:p>
           <a:p>
             <a:pPr lvl="1"/>
             <a:r>
-              <a:rPr lang="es-ES"/>
+              <a:rPr lang="es-MX"/>
               <a:t>Segundo nivel</a:t>
             </a:r>
           </a:p>
           <a:p>
             <a:pPr lvl="2"/>
             <a:r>
-              <a:rPr lang="es-ES"/>
+              <a:rPr lang="es-MX"/>
               <a:t>Tercer nivel</a:t>
             </a:r>
           </a:p>
           <a:p>
             <a:pPr lvl="3"/>
             <a:r>
-              <a:rPr lang="es-ES"/>
+              <a:rPr lang="es-MX"/>
               <a:t>Cuarto nivel</a:t>
             </a:r>
           </a:p>
           <a:p>
             <a:pPr lvl="4"/>
             <a:r>
-              <a:rPr lang="es-ES"/>
+              <a:rPr lang="es-MX"/>
               <a:t>Quinto nivel</a:t>
             </a:r>
             <a:endParaRPr lang="en-US" dirty="0"/>
@@ -1481,8 +1479,8 @@
         </p:nvSpPr>
         <p:spPr>
           <a:xfrm>
-            <a:off x="8229600" y="2241551"/>
-            <a:ext cx="6910917" cy="1098549"/>
+            <a:off x="4629150" y="1681163"/>
+            <a:ext cx="3887391" cy="823912"/>
           </a:xfrm>
         </p:spPr>
         <p:txBody>
@@ -1490,45 +1488,45 @@
           <a:lstStyle>
             <a:lvl1pPr marL="0" indent="0">
               <a:buNone/>
-              <a:defRPr sz="3200" b="1"/>
+              <a:defRPr sz="2400" b="1"/>
             </a:lvl1pPr>
-            <a:lvl2pPr marL="609585" indent="0">
-              <a:buNone/>
-              <a:defRPr sz="2667" b="1"/>
+            <a:lvl2pPr marL="457200" indent="0">
+              <a:buNone/>
+              <a:defRPr sz="2000" b="1"/>
             </a:lvl2pPr>
-            <a:lvl3pPr marL="1219170" indent="0">
-              <a:buNone/>
-              <a:defRPr sz="2400" b="1"/>
+            <a:lvl3pPr marL="914400" indent="0">
+              <a:buNone/>
+              <a:defRPr sz="1800" b="1"/>
             </a:lvl3pPr>
-            <a:lvl4pPr marL="1828754" indent="0">
-              <a:buNone/>
-              <a:defRPr sz="2133" b="1"/>
+            <a:lvl4pPr marL="1371600" indent="0">
+              <a:buNone/>
+              <a:defRPr sz="1600" b="1"/>
             </a:lvl4pPr>
-            <a:lvl5pPr marL="2438339" indent="0">
-              <a:buNone/>
-              <a:defRPr sz="2133" b="1"/>
+            <a:lvl5pPr marL="1828800" indent="0">
+              <a:buNone/>
+              <a:defRPr sz="1600" b="1"/>
             </a:lvl5pPr>
-            <a:lvl6pPr marL="3047924" indent="0">
-              <a:buNone/>
-              <a:defRPr sz="2133" b="1"/>
+            <a:lvl6pPr marL="2286000" indent="0">
+              <a:buNone/>
+              <a:defRPr sz="1600" b="1"/>
             </a:lvl6pPr>
-            <a:lvl7pPr marL="3657509" indent="0">
-              <a:buNone/>
-              <a:defRPr sz="2133" b="1"/>
+            <a:lvl7pPr marL="2743200" indent="0">
+              <a:buNone/>
+              <a:defRPr sz="1600" b="1"/>
             </a:lvl7pPr>
-            <a:lvl8pPr marL="4267093" indent="0">
-              <a:buNone/>
-              <a:defRPr sz="2133" b="1"/>
+            <a:lvl8pPr marL="3200400" indent="0">
+              <a:buNone/>
+              <a:defRPr sz="1600" b="1"/>
             </a:lvl8pPr>
-            <a:lvl9pPr marL="4876678" indent="0">
-              <a:buNone/>
-              <a:defRPr sz="2133" b="1"/>
+            <a:lvl9pPr marL="3657600" indent="0">
+              <a:buNone/>
+              <a:defRPr sz="1600" b="1"/>
             </a:lvl9pPr>
           </a:lstStyle>
           <a:p>
             <a:pPr lvl="0"/>
             <a:r>
-              <a:rPr lang="es-ES"/>
+              <a:rPr lang="es-MX"/>
               <a:t>Haga clic para modificar los estilos de texto del patrón</a:t>
             </a:r>
           </a:p>
@@ -1546,8 +1544,8 @@
         </p:nvSpPr>
         <p:spPr>
           <a:xfrm>
-            <a:off x="8229600" y="3340100"/>
-            <a:ext cx="6910917" cy="4912784"/>
+            <a:off x="4629150" y="2505075"/>
+            <a:ext cx="3887391" cy="3684588"/>
           </a:xfrm>
         </p:spPr>
         <p:txBody>
@@ -1556,35 +1554,35 @@
           <a:p>
             <a:pPr lvl="0"/>
             <a:r>
-              <a:rPr lang="es-ES"/>
+              <a:rPr lang="es-MX"/>
               <a:t>Haga clic para modificar los estilos de texto del patrón</a:t>
             </a:r>
           </a:p>
           <a:p>
             <a:pPr lvl="1"/>
             <a:r>
-              <a:rPr lang="es-ES"/>
+              <a:rPr lang="es-MX"/>
               <a:t>Segundo nivel</a:t>
             </a:r>
           </a:p>
           <a:p>
             <a:pPr lvl="2"/>
             <a:r>
-              <a:rPr lang="es-ES"/>
+              <a:rPr lang="es-MX"/>
               <a:t>Tercer nivel</a:t>
             </a:r>
           </a:p>
           <a:p>
             <a:pPr lvl="3"/>
             <a:r>
-              <a:rPr lang="es-ES"/>
+              <a:rPr lang="es-MX"/>
               <a:t>Cuarto nivel</a:t>
             </a:r>
           </a:p>
           <a:p>
             <a:pPr lvl="4"/>
             <a:r>
-              <a:rPr lang="es-ES"/>
+              <a:rPr lang="es-MX"/>
               <a:t>Quinto nivel</a:t>
             </a:r>
             <a:endParaRPr lang="en-US" dirty="0"/>
@@ -1608,7 +1606,7 @@
           <a:p>
             <a:fld id="{664CB750-BDA0-4B3C-9407-BAF21E562682}" type="datetimeFigureOut">
               <a:rPr lang="es-MX" smtClean="0"/>
-              <a:t>09/06/2025</a:t>
+              <a:t>17/06/2025</a:t>
             </a:fld>
             <a:endParaRPr lang="es-MX"/>
           </a:p>
@@ -1659,7 +1657,7 @@
     </p:spTree>
     <p:extLst>
       <p:ext uri="{BB962C8B-B14F-4D97-AF65-F5344CB8AC3E}">
-        <p14:creationId xmlns:p14="http://schemas.microsoft.com/office/powerpoint/2010/main" val="385700866"/>
+        <p14:creationId xmlns:p14="http://schemas.microsoft.com/office/powerpoint/2010/main" val="2837210668"/>
       </p:ext>
     </p:extLst>
   </p:cSld>
@@ -1702,8 +1700,8 @@
           <a:lstStyle/>
           <a:p>
             <a:r>
-              <a:rPr lang="es-ES"/>
-              <a:t>Haga clic para modificar el estilo de título del patrón</a:t>
+              <a:rPr lang="es-MX"/>
+              <a:t>Haz clic para modificar el estilo de título del patrón</a:t>
             </a:r>
             <a:endParaRPr lang="en-US" dirty="0"/>
           </a:p>
@@ -1726,7 +1724,7 @@
           <a:p>
             <a:fld id="{664CB750-BDA0-4B3C-9407-BAF21E562682}" type="datetimeFigureOut">
               <a:rPr lang="es-MX" smtClean="0"/>
-              <a:t>09/06/2025</a:t>
+              <a:t>17/06/2025</a:t>
             </a:fld>
             <a:endParaRPr lang="es-MX"/>
           </a:p>
@@ -1777,7 +1775,7 @@
     </p:spTree>
     <p:extLst>
       <p:ext uri="{BB962C8B-B14F-4D97-AF65-F5344CB8AC3E}">
-        <p14:creationId xmlns:p14="http://schemas.microsoft.com/office/powerpoint/2010/main" val="1786459661"/>
+        <p14:creationId xmlns:p14="http://schemas.microsoft.com/office/powerpoint/2010/main" val="3719194891"/>
       </p:ext>
     </p:extLst>
   </p:cSld>
@@ -1821,7 +1819,7 @@
           <a:p>
             <a:fld id="{664CB750-BDA0-4B3C-9407-BAF21E562682}" type="datetimeFigureOut">
               <a:rPr lang="es-MX" smtClean="0"/>
-              <a:t>09/06/2025</a:t>
+              <a:t>17/06/2025</a:t>
             </a:fld>
             <a:endParaRPr lang="es-MX"/>
           </a:p>
@@ -1872,7 +1870,7 @@
     </p:spTree>
     <p:extLst>
       <p:ext uri="{BB962C8B-B14F-4D97-AF65-F5344CB8AC3E}">
-        <p14:creationId xmlns:p14="http://schemas.microsoft.com/office/powerpoint/2010/main" val="1062920306"/>
+        <p14:creationId xmlns:p14="http://schemas.microsoft.com/office/powerpoint/2010/main" val="935190362"/>
       </p:ext>
     </p:extLst>
   </p:cSld>
@@ -1911,21 +1909,21 @@
         </p:nvSpPr>
         <p:spPr>
           <a:xfrm>
-            <a:off x="1119718" y="609600"/>
-            <a:ext cx="5242983" cy="2133600"/>
+            <a:off x="629841" y="457200"/>
+            <a:ext cx="2949178" cy="1600200"/>
           </a:xfrm>
         </p:spPr>
         <p:txBody>
           <a:bodyPr anchor="b"/>
           <a:lstStyle>
             <a:lvl1pPr>
-              <a:defRPr sz="4267"/>
+              <a:defRPr sz="3200"/>
             </a:lvl1pPr>
           </a:lstStyle>
           <a:p>
             <a:r>
-              <a:rPr lang="es-ES"/>
-              <a:t>Haga clic para modificar el estilo de título del patrón</a:t>
+              <a:rPr lang="es-MX"/>
+              <a:t>Haz clic para modificar el estilo de título del patrón</a:t>
             </a:r>
             <a:endParaRPr lang="en-US" dirty="0"/>
           </a:p>
@@ -1943,73 +1941,73 @@
         </p:nvSpPr>
         <p:spPr>
           <a:xfrm>
-            <a:off x="6910917" y="1316567"/>
-            <a:ext cx="8229600" cy="6498167"/>
+            <a:off x="3887391" y="987426"/>
+            <a:ext cx="4629150" cy="4873625"/>
           </a:xfrm>
         </p:spPr>
         <p:txBody>
           <a:bodyPr/>
           <a:lstStyle>
             <a:lvl1pPr>
-              <a:defRPr sz="4267"/>
+              <a:defRPr sz="3200"/>
             </a:lvl1pPr>
             <a:lvl2pPr>
-              <a:defRPr sz="3733"/>
+              <a:defRPr sz="2800"/>
             </a:lvl2pPr>
             <a:lvl3pPr>
-              <a:defRPr sz="3200"/>
+              <a:defRPr sz="2400"/>
             </a:lvl3pPr>
             <a:lvl4pPr>
-              <a:defRPr sz="2667"/>
+              <a:defRPr sz="2000"/>
             </a:lvl4pPr>
             <a:lvl5pPr>
-              <a:defRPr sz="2667"/>
+              <a:defRPr sz="2000"/>
             </a:lvl5pPr>
             <a:lvl6pPr>
-              <a:defRPr sz="2667"/>
+              <a:defRPr sz="2000"/>
             </a:lvl6pPr>
             <a:lvl7pPr>
-              <a:defRPr sz="2667"/>
+              <a:defRPr sz="2000"/>
             </a:lvl7pPr>
             <a:lvl8pPr>
-              <a:defRPr sz="2667"/>
+              <a:defRPr sz="2000"/>
             </a:lvl8pPr>
             <a:lvl9pPr>
-              <a:defRPr sz="2667"/>
+              <a:defRPr sz="2000"/>
             </a:lvl9pPr>
           </a:lstStyle>
           <a:p>
             <a:pPr lvl="0"/>
             <a:r>
-              <a:rPr lang="es-ES"/>
+              <a:rPr lang="es-MX"/>
               <a:t>Haga clic para modificar los estilos de texto del patrón</a:t>
             </a:r>
           </a:p>
           <a:p>
             <a:pPr lvl="1"/>
             <a:r>
-              <a:rPr lang="es-ES"/>
+              <a:rPr lang="es-MX"/>
               <a:t>Segundo nivel</a:t>
             </a:r>
           </a:p>
           <a:p>
             <a:pPr lvl="2"/>
             <a:r>
-              <a:rPr lang="es-ES"/>
+              <a:rPr lang="es-MX"/>
               <a:t>Tercer nivel</a:t>
             </a:r>
           </a:p>
           <a:p>
             <a:pPr lvl="3"/>
             <a:r>
-              <a:rPr lang="es-ES"/>
+              <a:rPr lang="es-MX"/>
               <a:t>Cuarto nivel</a:t>
             </a:r>
           </a:p>
           <a:p>
             <a:pPr lvl="4"/>
             <a:r>
-              <a:rPr lang="es-ES"/>
+              <a:rPr lang="es-MX"/>
               <a:t>Quinto nivel</a:t>
             </a:r>
             <a:endParaRPr lang="en-US" dirty="0"/>
@@ -2028,8 +2026,8 @@
         </p:nvSpPr>
         <p:spPr>
           <a:xfrm>
-            <a:off x="1119718" y="2743200"/>
-            <a:ext cx="5242983" cy="5082117"/>
+            <a:off x="629841" y="2057400"/>
+            <a:ext cx="2949178" cy="3811588"/>
           </a:xfrm>
         </p:spPr>
         <p:txBody>
@@ -2037,45 +2035,45 @@
           <a:lstStyle>
             <a:lvl1pPr marL="0" indent="0">
               <a:buNone/>
-              <a:defRPr sz="2133"/>
+              <a:defRPr sz="1600"/>
             </a:lvl1pPr>
-            <a:lvl2pPr marL="609585" indent="0">
-              <a:buNone/>
-              <a:defRPr sz="1867"/>
+            <a:lvl2pPr marL="457200" indent="0">
+              <a:buNone/>
+              <a:defRPr sz="1400"/>
             </a:lvl2pPr>
-            <a:lvl3pPr marL="1219170" indent="0">
-              <a:buNone/>
-              <a:defRPr sz="1600"/>
+            <a:lvl3pPr marL="914400" indent="0">
+              <a:buNone/>
+              <a:defRPr sz="1200"/>
             </a:lvl3pPr>
-            <a:lvl4pPr marL="1828754" indent="0">
-              <a:buNone/>
-              <a:defRPr sz="1333"/>
+            <a:lvl4pPr marL="1371600" indent="0">
+              <a:buNone/>
+              <a:defRPr sz="1000"/>
             </a:lvl4pPr>
-            <a:lvl5pPr marL="2438339" indent="0">
-              <a:buNone/>
-              <a:defRPr sz="1333"/>
+            <a:lvl5pPr marL="1828800" indent="0">
+              <a:buNone/>
+              <a:defRPr sz="1000"/>
             </a:lvl5pPr>
-            <a:lvl6pPr marL="3047924" indent="0">
-              <a:buNone/>
-              <a:defRPr sz="1333"/>
+            <a:lvl6pPr marL="2286000" indent="0">
+              <a:buNone/>
+              <a:defRPr sz="1000"/>
             </a:lvl6pPr>
-            <a:lvl7pPr marL="3657509" indent="0">
-              <a:buNone/>
-              <a:defRPr sz="1333"/>
+            <a:lvl7pPr marL="2743200" indent="0">
+              <a:buNone/>
+              <a:defRPr sz="1000"/>
             </a:lvl7pPr>
-            <a:lvl8pPr marL="4267093" indent="0">
-              <a:buNone/>
-              <a:defRPr sz="1333"/>
+            <a:lvl8pPr marL="3200400" indent="0">
+              <a:buNone/>
+              <a:defRPr sz="1000"/>
             </a:lvl8pPr>
-            <a:lvl9pPr marL="4876678" indent="0">
-              <a:buNone/>
-              <a:defRPr sz="1333"/>
+            <a:lvl9pPr marL="3657600" indent="0">
+              <a:buNone/>
+              <a:defRPr sz="1000"/>
             </a:lvl9pPr>
           </a:lstStyle>
           <a:p>
             <a:pPr lvl="0"/>
             <a:r>
-              <a:rPr lang="es-ES"/>
+              <a:rPr lang="es-MX"/>
               <a:t>Haga clic para modificar los estilos de texto del patrón</a:t>
             </a:r>
           </a:p>
@@ -2098,7 +2096,7 @@
           <a:p>
             <a:fld id="{664CB750-BDA0-4B3C-9407-BAF21E562682}" type="datetimeFigureOut">
               <a:rPr lang="es-MX" smtClean="0"/>
-              <a:t>09/06/2025</a:t>
+              <a:t>17/06/2025</a:t>
             </a:fld>
             <a:endParaRPr lang="es-MX"/>
           </a:p>
@@ -2149,7 +2147,7 @@
     </p:spTree>
     <p:extLst>
       <p:ext uri="{BB962C8B-B14F-4D97-AF65-F5344CB8AC3E}">
-        <p14:creationId xmlns:p14="http://schemas.microsoft.com/office/powerpoint/2010/main" val="4159745678"/>
+        <p14:creationId xmlns:p14="http://schemas.microsoft.com/office/powerpoint/2010/main" val="3621379316"/>
       </p:ext>
     </p:extLst>
   </p:cSld>
@@ -2188,21 +2186,21 @@
         </p:nvSpPr>
         <p:spPr>
           <a:xfrm>
-            <a:off x="1119718" y="609600"/>
-            <a:ext cx="5242983" cy="2133600"/>
+            <a:off x="629841" y="457200"/>
+            <a:ext cx="2949178" cy="1600200"/>
           </a:xfrm>
         </p:spPr>
         <p:txBody>
           <a:bodyPr anchor="b"/>
           <a:lstStyle>
             <a:lvl1pPr>
-              <a:defRPr sz="4267"/>
+              <a:defRPr sz="3200"/>
             </a:lvl1pPr>
           </a:lstStyle>
           <a:p>
             <a:r>
-              <a:rPr lang="es-ES"/>
-              <a:t>Haga clic para modificar el estilo de título del patrón</a:t>
+              <a:rPr lang="es-MX"/>
+              <a:t>Haz clic para modificar el estilo de título del patrón</a:t>
             </a:r>
             <a:endParaRPr lang="en-US" dirty="0"/>
           </a:p>
@@ -2220,8 +2218,8 @@
         </p:nvSpPr>
         <p:spPr>
           <a:xfrm>
-            <a:off x="6910917" y="1316567"/>
-            <a:ext cx="8229600" cy="6498167"/>
+            <a:off x="3887391" y="987426"/>
+            <a:ext cx="4629150" cy="4873625"/>
           </a:xfrm>
         </p:spPr>
         <p:txBody>
@@ -2229,45 +2227,45 @@
           <a:lstStyle>
             <a:lvl1pPr marL="0" indent="0">
               <a:buNone/>
-              <a:defRPr sz="4267"/>
+              <a:defRPr sz="3200"/>
             </a:lvl1pPr>
-            <a:lvl2pPr marL="609585" indent="0">
-              <a:buNone/>
-              <a:defRPr sz="3733"/>
+            <a:lvl2pPr marL="457200" indent="0">
+              <a:buNone/>
+              <a:defRPr sz="2800"/>
             </a:lvl2pPr>
-            <a:lvl3pPr marL="1219170" indent="0">
-              <a:buNone/>
-              <a:defRPr sz="3200"/>
+            <a:lvl3pPr marL="914400" indent="0">
+              <a:buNone/>
+              <a:defRPr sz="2400"/>
             </a:lvl3pPr>
-            <a:lvl4pPr marL="1828754" indent="0">
-              <a:buNone/>
-              <a:defRPr sz="2667"/>
+            <a:lvl4pPr marL="1371600" indent="0">
+              <a:buNone/>
+              <a:defRPr sz="2000"/>
             </a:lvl4pPr>
-            <a:lvl5pPr marL="2438339" indent="0">
-              <a:buNone/>
-              <a:defRPr sz="2667"/>
+            <a:lvl5pPr marL="1828800" indent="0">
+              <a:buNone/>
+              <a:defRPr sz="2000"/>
             </a:lvl5pPr>
-            <a:lvl6pPr marL="3047924" indent="0">
-              <a:buNone/>
-              <a:defRPr sz="2667"/>
+            <a:lvl6pPr marL="2286000" indent="0">
+              <a:buNone/>
+              <a:defRPr sz="2000"/>
             </a:lvl6pPr>
-            <a:lvl7pPr marL="3657509" indent="0">
-              <a:buNone/>
-              <a:defRPr sz="2667"/>
+            <a:lvl7pPr marL="2743200" indent="0">
+              <a:buNone/>
+              <a:defRPr sz="2000"/>
             </a:lvl7pPr>
-            <a:lvl8pPr marL="4267093" indent="0">
-              <a:buNone/>
-              <a:defRPr sz="2667"/>
+            <a:lvl8pPr marL="3200400" indent="0">
+              <a:buNone/>
+              <a:defRPr sz="2000"/>
             </a:lvl8pPr>
-            <a:lvl9pPr marL="4876678" indent="0">
-              <a:buNone/>
-              <a:defRPr sz="2667"/>
+            <a:lvl9pPr marL="3657600" indent="0">
+              <a:buNone/>
+              <a:defRPr sz="2000"/>
             </a:lvl9pPr>
           </a:lstStyle>
           <a:p>
             <a:r>
-              <a:rPr lang="es-ES"/>
-              <a:t>Haga clic en el icono para agregar una imagen</a:t>
+              <a:rPr lang="es-MX"/>
+              <a:t>Haz clic en el icono para agregar una imagen</a:t>
             </a:r>
             <a:endParaRPr lang="en-US" dirty="0"/>
           </a:p>
@@ -2285,8 +2283,8 @@
         </p:nvSpPr>
         <p:spPr>
           <a:xfrm>
-            <a:off x="1119718" y="2743200"/>
-            <a:ext cx="5242983" cy="5082117"/>
+            <a:off x="629841" y="2057400"/>
+            <a:ext cx="2949178" cy="3811588"/>
           </a:xfrm>
         </p:spPr>
         <p:txBody>
@@ -2294,45 +2292,45 @@
           <a:lstStyle>
             <a:lvl1pPr marL="0" indent="0">
               <a:buNone/>
-              <a:defRPr sz="2133"/>
+              <a:defRPr sz="1600"/>
             </a:lvl1pPr>
-            <a:lvl2pPr marL="609585" indent="0">
-              <a:buNone/>
-              <a:defRPr sz="1867"/>
+            <a:lvl2pPr marL="457200" indent="0">
+              <a:buNone/>
+              <a:defRPr sz="1400"/>
             </a:lvl2pPr>
-            <a:lvl3pPr marL="1219170" indent="0">
-              <a:buNone/>
-              <a:defRPr sz="1600"/>
+            <a:lvl3pPr marL="914400" indent="0">
+              <a:buNone/>
+              <a:defRPr sz="1200"/>
             </a:lvl3pPr>
-            <a:lvl4pPr marL="1828754" indent="0">
-              <a:buNone/>
-              <a:defRPr sz="1333"/>
+            <a:lvl4pPr marL="1371600" indent="0">
+              <a:buNone/>
+              <a:defRPr sz="1000"/>
             </a:lvl4pPr>
-            <a:lvl5pPr marL="2438339" indent="0">
-              <a:buNone/>
-              <a:defRPr sz="1333"/>
+            <a:lvl5pPr marL="1828800" indent="0">
+              <a:buNone/>
+              <a:defRPr sz="1000"/>
             </a:lvl5pPr>
-            <a:lvl6pPr marL="3047924" indent="0">
-              <a:buNone/>
-              <a:defRPr sz="1333"/>
+            <a:lvl6pPr marL="2286000" indent="0">
+              <a:buNone/>
+              <a:defRPr sz="1000"/>
             </a:lvl6pPr>
-            <a:lvl7pPr marL="3657509" indent="0">
-              <a:buNone/>
-              <a:defRPr sz="1333"/>
+            <a:lvl7pPr marL="2743200" indent="0">
+              <a:buNone/>
+              <a:defRPr sz="1000"/>
             </a:lvl7pPr>
-            <a:lvl8pPr marL="4267093" indent="0">
-              <a:buNone/>
-              <a:defRPr sz="1333"/>
+            <a:lvl8pPr marL="3200400" indent="0">
+              <a:buNone/>
+              <a:defRPr sz="1000"/>
             </a:lvl8pPr>
-            <a:lvl9pPr marL="4876678" indent="0">
-              <a:buNone/>
-              <a:defRPr sz="1333"/>
+            <a:lvl9pPr marL="3657600" indent="0">
+              <a:buNone/>
+              <a:defRPr sz="1000"/>
             </a:lvl9pPr>
           </a:lstStyle>
           <a:p>
             <a:pPr lvl="0"/>
             <a:r>
-              <a:rPr lang="es-ES"/>
+              <a:rPr lang="es-MX"/>
               <a:t>Haga clic para modificar los estilos de texto del patrón</a:t>
             </a:r>
           </a:p>
@@ -2355,7 +2353,7 @@
           <a:p>
             <a:fld id="{664CB750-BDA0-4B3C-9407-BAF21E562682}" type="datetimeFigureOut">
               <a:rPr lang="es-MX" smtClean="0"/>
-              <a:t>09/06/2025</a:t>
+              <a:t>17/06/2025</a:t>
             </a:fld>
             <a:endParaRPr lang="es-MX"/>
           </a:p>
@@ -2406,7 +2404,7 @@
     </p:spTree>
     <p:extLst>
       <p:ext uri="{BB962C8B-B14F-4D97-AF65-F5344CB8AC3E}">
-        <p14:creationId xmlns:p14="http://schemas.microsoft.com/office/powerpoint/2010/main" val="1541242943"/>
+        <p14:creationId xmlns:p14="http://schemas.microsoft.com/office/powerpoint/2010/main" val="539529659"/>
       </p:ext>
     </p:extLst>
   </p:cSld>
@@ -2450,8 +2448,8 @@
         </p:nvSpPr>
         <p:spPr>
           <a:xfrm>
-            <a:off x="1117600" y="486834"/>
-            <a:ext cx="14020800" cy="1767417"/>
+            <a:off x="628650" y="365126"/>
+            <a:ext cx="7886700" cy="1325563"/>
           </a:xfrm>
           <a:prstGeom prst="rect">
             <a:avLst/>
@@ -2464,8 +2462,8 @@
           <a:lstStyle/>
           <a:p>
             <a:r>
-              <a:rPr lang="es-ES"/>
-              <a:t>Haga clic para modificar el estilo de título del patrón</a:t>
+              <a:rPr lang="es-MX"/>
+              <a:t>Haz clic para modificar el estilo de título del patrón</a:t>
             </a:r>
             <a:endParaRPr lang="en-US" dirty="0"/>
           </a:p>
@@ -2483,8 +2481,8 @@
         </p:nvSpPr>
         <p:spPr>
           <a:xfrm>
-            <a:off x="1117600" y="2434167"/>
-            <a:ext cx="14020800" cy="5801784"/>
+            <a:off x="628650" y="1825625"/>
+            <a:ext cx="7886700" cy="4351338"/>
           </a:xfrm>
           <a:prstGeom prst="rect">
             <a:avLst/>
@@ -2498,35 +2496,35 @@
           <a:p>
             <a:pPr lvl="0"/>
             <a:r>
-              <a:rPr lang="es-ES"/>
+              <a:rPr lang="es-MX"/>
               <a:t>Haga clic para modificar los estilos de texto del patrón</a:t>
             </a:r>
           </a:p>
           <a:p>
             <a:pPr lvl="1"/>
             <a:r>
-              <a:rPr lang="es-ES"/>
+              <a:rPr lang="es-MX"/>
               <a:t>Segundo nivel</a:t>
             </a:r>
           </a:p>
           <a:p>
             <a:pPr lvl="2"/>
             <a:r>
-              <a:rPr lang="es-ES"/>
+              <a:rPr lang="es-MX"/>
               <a:t>Tercer nivel</a:t>
             </a:r>
           </a:p>
           <a:p>
             <a:pPr lvl="3"/>
             <a:r>
-              <a:rPr lang="es-ES"/>
+              <a:rPr lang="es-MX"/>
               <a:t>Cuarto nivel</a:t>
             </a:r>
           </a:p>
           <a:p>
             <a:pPr lvl="4"/>
             <a:r>
-              <a:rPr lang="es-ES"/>
+              <a:rPr lang="es-MX"/>
               <a:t>Quinto nivel</a:t>
             </a:r>
             <a:endParaRPr lang="en-US" dirty="0"/>
@@ -2545,8 +2543,8 @@
         </p:nvSpPr>
         <p:spPr>
           <a:xfrm>
-            <a:off x="1117600" y="8475134"/>
-            <a:ext cx="3657600" cy="486833"/>
+            <a:off x="628650" y="6356351"/>
+            <a:ext cx="2057400" cy="365125"/>
           </a:xfrm>
           <a:prstGeom prst="rect">
             <a:avLst/>
@@ -2556,7 +2554,7 @@
           <a:bodyPr vert="horz" lIns="91440" tIns="45720" rIns="91440" bIns="45720" rtlCol="0" anchor="ctr"/>
           <a:lstStyle>
             <a:lvl1pPr algn="l">
-              <a:defRPr sz="1600">
+              <a:defRPr sz="1200">
                 <a:solidFill>
                   <a:schemeClr val="tx1">
                     <a:tint val="75000"/>
@@ -2568,7 +2566,7 @@
           <a:p>
             <a:fld id="{664CB750-BDA0-4B3C-9407-BAF21E562682}" type="datetimeFigureOut">
               <a:rPr lang="es-MX" smtClean="0"/>
-              <a:t>09/06/2025</a:t>
+              <a:t>17/06/2025</a:t>
             </a:fld>
             <a:endParaRPr lang="es-MX"/>
           </a:p>
@@ -2586,8 +2584,8 @@
         </p:nvSpPr>
         <p:spPr>
           <a:xfrm>
-            <a:off x="5384800" y="8475134"/>
-            <a:ext cx="5486400" cy="486833"/>
+            <a:off x="3028950" y="6356351"/>
+            <a:ext cx="3086100" cy="365125"/>
           </a:xfrm>
           <a:prstGeom prst="rect">
             <a:avLst/>
@@ -2597,7 +2595,7 @@
           <a:bodyPr vert="horz" lIns="91440" tIns="45720" rIns="91440" bIns="45720" rtlCol="0" anchor="ctr"/>
           <a:lstStyle>
             <a:lvl1pPr algn="ctr">
-              <a:defRPr sz="1600">
+              <a:defRPr sz="1200">
                 <a:solidFill>
                   <a:schemeClr val="tx1">
                     <a:tint val="75000"/>
@@ -2623,8 +2621,8 @@
         </p:nvSpPr>
         <p:spPr>
           <a:xfrm>
-            <a:off x="11480800" y="8475134"/>
-            <a:ext cx="3657600" cy="486833"/>
+            <a:off x="6457950" y="6356351"/>
+            <a:ext cx="2057400" cy="365125"/>
           </a:xfrm>
           <a:prstGeom prst="rect">
             <a:avLst/>
@@ -2634,7 +2632,7 @@
           <a:bodyPr vert="horz" lIns="91440" tIns="45720" rIns="91440" bIns="45720" rtlCol="0" anchor="ctr"/>
           <a:lstStyle>
             <a:lvl1pPr algn="r">
-              <a:defRPr sz="1600">
+              <a:defRPr sz="1200">
                 <a:solidFill>
                   <a:schemeClr val="tx1">
                     <a:tint val="75000"/>
@@ -2655,27 +2653,27 @@
     </p:spTree>
     <p:extLst>
       <p:ext uri="{BB962C8B-B14F-4D97-AF65-F5344CB8AC3E}">
-        <p14:creationId xmlns:p14="http://schemas.microsoft.com/office/powerpoint/2010/main" val="246438795"/>
+        <p14:creationId xmlns:p14="http://schemas.microsoft.com/office/powerpoint/2010/main" val="295072636"/>
       </p:ext>
     </p:extLst>
   </p:cSld>
   <p:clrMap bg1="lt1" tx1="dk1" bg2="lt2" tx2="dk2" accent1="accent1" accent2="accent2" accent3="accent3" accent4="accent4" accent5="accent5" accent6="accent6" hlink="hlink" folHlink="folHlink"/>
   <p:sldLayoutIdLst>
-    <p:sldLayoutId id="2147483697" r:id="rId1"/>
-    <p:sldLayoutId id="2147483698" r:id="rId2"/>
-    <p:sldLayoutId id="2147483699" r:id="rId3"/>
-    <p:sldLayoutId id="2147483700" r:id="rId4"/>
-    <p:sldLayoutId id="2147483701" r:id="rId5"/>
-    <p:sldLayoutId id="2147483702" r:id="rId6"/>
-    <p:sldLayoutId id="2147483703" r:id="rId7"/>
-    <p:sldLayoutId id="2147483704" r:id="rId8"/>
-    <p:sldLayoutId id="2147483705" r:id="rId9"/>
-    <p:sldLayoutId id="2147483706" r:id="rId10"/>
-    <p:sldLayoutId id="2147483707" r:id="rId11"/>
+    <p:sldLayoutId id="2147483709" r:id="rId1"/>
+    <p:sldLayoutId id="2147483710" r:id="rId2"/>
+    <p:sldLayoutId id="2147483711" r:id="rId3"/>
+    <p:sldLayoutId id="2147483712" r:id="rId4"/>
+    <p:sldLayoutId id="2147483713" r:id="rId5"/>
+    <p:sldLayoutId id="2147483714" r:id="rId6"/>
+    <p:sldLayoutId id="2147483715" r:id="rId7"/>
+    <p:sldLayoutId id="2147483716" r:id="rId8"/>
+    <p:sldLayoutId id="2147483717" r:id="rId9"/>
+    <p:sldLayoutId id="2147483718" r:id="rId10"/>
+    <p:sldLayoutId id="2147483719" r:id="rId11"/>
   </p:sldLayoutIdLst>
   <p:txStyles>
     <p:titleStyle>
-      <a:lvl1pPr algn="l" defTabSz="1219170" rtl="0" eaLnBrk="1" latinLnBrk="0" hangingPunct="1">
+      <a:lvl1pPr algn="l" defTabSz="914400" rtl="0" eaLnBrk="1" latinLnBrk="0" hangingPunct="1">
         <a:lnSpc>
           <a:spcPct val="90000"/>
         </a:lnSpc>
@@ -2683,7 +2681,7 @@
           <a:spcPct val="0"/>
         </a:spcBef>
         <a:buNone/>
-        <a:defRPr sz="5867" kern="1200">
+        <a:defRPr sz="4400" kern="1200">
           <a:solidFill>
             <a:schemeClr val="tx1"/>
           </a:solidFill>
@@ -2694,16 +2692,16 @@
       </a:lvl1pPr>
     </p:titleStyle>
     <p:bodyStyle>
-      <a:lvl1pPr marL="304792" indent="-304792" algn="l" defTabSz="1219170" rtl="0" eaLnBrk="1" latinLnBrk="0" hangingPunct="1">
+      <a:lvl1pPr marL="228600" indent="-228600" algn="l" defTabSz="914400" rtl="0" eaLnBrk="1" latinLnBrk="0" hangingPunct="1">
         <a:lnSpc>
           <a:spcPct val="90000"/>
         </a:lnSpc>
         <a:spcBef>
-          <a:spcPts val="1333"/>
+          <a:spcPts val="1000"/>
         </a:spcBef>
         <a:buFont typeface="Arial" panose="020B0604020202020204" pitchFamily="34" charset="0"/>
         <a:buChar char="•"/>
-        <a:defRPr sz="3733" kern="1200">
+        <a:defRPr sz="2800" kern="1200">
           <a:solidFill>
             <a:schemeClr val="tx1"/>
           </a:solidFill>
@@ -2712,48 +2710,12 @@
           <a:cs typeface="+mn-cs"/>
         </a:defRPr>
       </a:lvl1pPr>
-      <a:lvl2pPr marL="914377" indent="-304792" algn="l" defTabSz="1219170" rtl="0" eaLnBrk="1" latinLnBrk="0" hangingPunct="1">
+      <a:lvl2pPr marL="685800" indent="-228600" algn="l" defTabSz="914400" rtl="0" eaLnBrk="1" latinLnBrk="0" hangingPunct="1">
         <a:lnSpc>
           <a:spcPct val="90000"/>
         </a:lnSpc>
         <a:spcBef>
-          <a:spcPts val="667"/>
-        </a:spcBef>
-        <a:buFont typeface="Arial" panose="020B0604020202020204" pitchFamily="34" charset="0"/>
-        <a:buChar char="•"/>
-        <a:defRPr sz="3200" kern="1200">
-          <a:solidFill>
-            <a:schemeClr val="tx1"/>
-          </a:solidFill>
-          <a:latin typeface="+mn-lt"/>
-          <a:ea typeface="+mn-ea"/>
-          <a:cs typeface="+mn-cs"/>
-        </a:defRPr>
-      </a:lvl2pPr>
-      <a:lvl3pPr marL="1523962" indent="-304792" algn="l" defTabSz="1219170" rtl="0" eaLnBrk="1" latinLnBrk="0" hangingPunct="1">
-        <a:lnSpc>
-          <a:spcPct val="90000"/>
-        </a:lnSpc>
-        <a:spcBef>
-          <a:spcPts val="667"/>
-        </a:spcBef>
-        <a:buFont typeface="Arial" panose="020B0604020202020204" pitchFamily="34" charset="0"/>
-        <a:buChar char="•"/>
-        <a:defRPr sz="2667" kern="1200">
-          <a:solidFill>
-            <a:schemeClr val="tx1"/>
-          </a:solidFill>
-          <a:latin typeface="+mn-lt"/>
-          <a:ea typeface="+mn-ea"/>
-          <a:cs typeface="+mn-cs"/>
-        </a:defRPr>
-      </a:lvl3pPr>
-      <a:lvl4pPr marL="2133547" indent="-304792" algn="l" defTabSz="1219170" rtl="0" eaLnBrk="1" latinLnBrk="0" hangingPunct="1">
-        <a:lnSpc>
-          <a:spcPct val="90000"/>
-        </a:lnSpc>
-        <a:spcBef>
-          <a:spcPts val="667"/>
+          <a:spcPts val="500"/>
         </a:spcBef>
         <a:buFont typeface="Arial" panose="020B0604020202020204" pitchFamily="34" charset="0"/>
         <a:buChar char="•"/>
@@ -2765,17 +2727,53 @@
           <a:ea typeface="+mn-ea"/>
           <a:cs typeface="+mn-cs"/>
         </a:defRPr>
-      </a:lvl4pPr>
-      <a:lvl5pPr marL="2743131" indent="-304792" algn="l" defTabSz="1219170" rtl="0" eaLnBrk="1" latinLnBrk="0" hangingPunct="1">
+      </a:lvl2pPr>
+      <a:lvl3pPr marL="1143000" indent="-228600" algn="l" defTabSz="914400" rtl="0" eaLnBrk="1" latinLnBrk="0" hangingPunct="1">
         <a:lnSpc>
           <a:spcPct val="90000"/>
         </a:lnSpc>
         <a:spcBef>
-          <a:spcPts val="667"/>
+          <a:spcPts val="500"/>
         </a:spcBef>
         <a:buFont typeface="Arial" panose="020B0604020202020204" pitchFamily="34" charset="0"/>
         <a:buChar char="•"/>
-        <a:defRPr sz="2400" kern="1200">
+        <a:defRPr sz="2000" kern="1200">
+          <a:solidFill>
+            <a:schemeClr val="tx1"/>
+          </a:solidFill>
+          <a:latin typeface="+mn-lt"/>
+          <a:ea typeface="+mn-ea"/>
+          <a:cs typeface="+mn-cs"/>
+        </a:defRPr>
+      </a:lvl3pPr>
+      <a:lvl4pPr marL="1600200" indent="-228600" algn="l" defTabSz="914400" rtl="0" eaLnBrk="1" latinLnBrk="0" hangingPunct="1">
+        <a:lnSpc>
+          <a:spcPct val="90000"/>
+        </a:lnSpc>
+        <a:spcBef>
+          <a:spcPts val="500"/>
+        </a:spcBef>
+        <a:buFont typeface="Arial" panose="020B0604020202020204" pitchFamily="34" charset="0"/>
+        <a:buChar char="•"/>
+        <a:defRPr sz="1800" kern="1200">
+          <a:solidFill>
+            <a:schemeClr val="tx1"/>
+          </a:solidFill>
+          <a:latin typeface="+mn-lt"/>
+          <a:ea typeface="+mn-ea"/>
+          <a:cs typeface="+mn-cs"/>
+        </a:defRPr>
+      </a:lvl4pPr>
+      <a:lvl5pPr marL="2057400" indent="-228600" algn="l" defTabSz="914400" rtl="0" eaLnBrk="1" latinLnBrk="0" hangingPunct="1">
+        <a:lnSpc>
+          <a:spcPct val="90000"/>
+        </a:lnSpc>
+        <a:spcBef>
+          <a:spcPts val="500"/>
+        </a:spcBef>
+        <a:buFont typeface="Arial" panose="020B0604020202020204" pitchFamily="34" charset="0"/>
+        <a:buChar char="•"/>
+        <a:defRPr sz="1800" kern="1200">
           <a:solidFill>
             <a:schemeClr val="tx1"/>
           </a:solidFill>
@@ -2784,16 +2782,16 @@
           <a:cs typeface="+mn-cs"/>
         </a:defRPr>
       </a:lvl5pPr>
-      <a:lvl6pPr marL="3352716" indent="-304792" algn="l" defTabSz="1219170" rtl="0" eaLnBrk="1" latinLnBrk="0" hangingPunct="1">
+      <a:lvl6pPr marL="2514600" indent="-228600" algn="l" defTabSz="914400" rtl="0" eaLnBrk="1" latinLnBrk="0" hangingPunct="1">
         <a:lnSpc>
           <a:spcPct val="90000"/>
         </a:lnSpc>
         <a:spcBef>
-          <a:spcPts val="667"/>
+          <a:spcPts val="500"/>
         </a:spcBef>
         <a:buFont typeface="Arial" panose="020B0604020202020204" pitchFamily="34" charset="0"/>
         <a:buChar char="•"/>
-        <a:defRPr sz="2400" kern="1200">
+        <a:defRPr sz="1800" kern="1200">
           <a:solidFill>
             <a:schemeClr val="tx1"/>
           </a:solidFill>
@@ -2802,16 +2800,16 @@
           <a:cs typeface="+mn-cs"/>
         </a:defRPr>
       </a:lvl6pPr>
-      <a:lvl7pPr marL="3962301" indent="-304792" algn="l" defTabSz="1219170" rtl="0" eaLnBrk="1" latinLnBrk="0" hangingPunct="1">
+      <a:lvl7pPr marL="2971800" indent="-228600" algn="l" defTabSz="914400" rtl="0" eaLnBrk="1" latinLnBrk="0" hangingPunct="1">
         <a:lnSpc>
           <a:spcPct val="90000"/>
         </a:lnSpc>
         <a:spcBef>
-          <a:spcPts val="667"/>
+          <a:spcPts val="500"/>
         </a:spcBef>
         <a:buFont typeface="Arial" panose="020B0604020202020204" pitchFamily="34" charset="0"/>
         <a:buChar char="•"/>
-        <a:defRPr sz="2400" kern="1200">
+        <a:defRPr sz="1800" kern="1200">
           <a:solidFill>
             <a:schemeClr val="tx1"/>
           </a:solidFill>
@@ -2820,16 +2818,16 @@
           <a:cs typeface="+mn-cs"/>
         </a:defRPr>
       </a:lvl7pPr>
-      <a:lvl8pPr marL="4571886" indent="-304792" algn="l" defTabSz="1219170" rtl="0" eaLnBrk="1" latinLnBrk="0" hangingPunct="1">
+      <a:lvl8pPr marL="3429000" indent="-228600" algn="l" defTabSz="914400" rtl="0" eaLnBrk="1" latinLnBrk="0" hangingPunct="1">
         <a:lnSpc>
           <a:spcPct val="90000"/>
         </a:lnSpc>
         <a:spcBef>
-          <a:spcPts val="667"/>
+          <a:spcPts val="500"/>
         </a:spcBef>
         <a:buFont typeface="Arial" panose="020B0604020202020204" pitchFamily="34" charset="0"/>
         <a:buChar char="•"/>
-        <a:defRPr sz="2400" kern="1200">
+        <a:defRPr sz="1800" kern="1200">
           <a:solidFill>
             <a:schemeClr val="tx1"/>
           </a:solidFill>
@@ -2838,16 +2836,16 @@
           <a:cs typeface="+mn-cs"/>
         </a:defRPr>
       </a:lvl8pPr>
-      <a:lvl9pPr marL="5181470" indent="-304792" algn="l" defTabSz="1219170" rtl="0" eaLnBrk="1" latinLnBrk="0" hangingPunct="1">
+      <a:lvl9pPr marL="3886200" indent="-228600" algn="l" defTabSz="914400" rtl="0" eaLnBrk="1" latinLnBrk="0" hangingPunct="1">
         <a:lnSpc>
           <a:spcPct val="90000"/>
         </a:lnSpc>
         <a:spcBef>
-          <a:spcPts val="667"/>
+          <a:spcPts val="500"/>
         </a:spcBef>
         <a:buFont typeface="Arial" panose="020B0604020202020204" pitchFamily="34" charset="0"/>
         <a:buChar char="•"/>
-        <a:defRPr sz="2400" kern="1200">
+        <a:defRPr sz="1800" kern="1200">
           <a:solidFill>
             <a:schemeClr val="tx1"/>
           </a:solidFill>
@@ -2861,8 +2859,8 @@
       <a:defPPr>
         <a:defRPr lang="en-US"/>
       </a:defPPr>
-      <a:lvl1pPr marL="0" algn="l" defTabSz="1219170" rtl="0" eaLnBrk="1" latinLnBrk="0" hangingPunct="1">
-        <a:defRPr sz="2400" kern="1200">
+      <a:lvl1pPr marL="0" algn="l" defTabSz="914400" rtl="0" eaLnBrk="1" latinLnBrk="0" hangingPunct="1">
+        <a:defRPr sz="1800" kern="1200">
           <a:solidFill>
             <a:schemeClr val="tx1"/>
           </a:solidFill>
@@ -2871,8 +2869,8 @@
           <a:cs typeface="+mn-cs"/>
         </a:defRPr>
       </a:lvl1pPr>
-      <a:lvl2pPr marL="609585" algn="l" defTabSz="1219170" rtl="0" eaLnBrk="1" latinLnBrk="0" hangingPunct="1">
-        <a:defRPr sz="2400" kern="1200">
+      <a:lvl2pPr marL="457200" algn="l" defTabSz="914400" rtl="0" eaLnBrk="1" latinLnBrk="0" hangingPunct="1">
+        <a:defRPr sz="1800" kern="1200">
           <a:solidFill>
             <a:schemeClr val="tx1"/>
           </a:solidFill>
@@ -2881,8 +2879,8 @@
           <a:cs typeface="+mn-cs"/>
         </a:defRPr>
       </a:lvl2pPr>
-      <a:lvl3pPr marL="1219170" algn="l" defTabSz="1219170" rtl="0" eaLnBrk="1" latinLnBrk="0" hangingPunct="1">
-        <a:defRPr sz="2400" kern="1200">
+      <a:lvl3pPr marL="914400" algn="l" defTabSz="914400" rtl="0" eaLnBrk="1" latinLnBrk="0" hangingPunct="1">
+        <a:defRPr sz="1800" kern="1200">
           <a:solidFill>
             <a:schemeClr val="tx1"/>
           </a:solidFill>
@@ -2891,8 +2889,8 @@
           <a:cs typeface="+mn-cs"/>
         </a:defRPr>
       </a:lvl3pPr>
-      <a:lvl4pPr marL="1828754" algn="l" defTabSz="1219170" rtl="0" eaLnBrk="1" latinLnBrk="0" hangingPunct="1">
-        <a:defRPr sz="2400" kern="1200">
+      <a:lvl4pPr marL="1371600" algn="l" defTabSz="914400" rtl="0" eaLnBrk="1" latinLnBrk="0" hangingPunct="1">
+        <a:defRPr sz="1800" kern="1200">
           <a:solidFill>
             <a:schemeClr val="tx1"/>
           </a:solidFill>
@@ -2901,8 +2899,8 @@
           <a:cs typeface="+mn-cs"/>
         </a:defRPr>
       </a:lvl4pPr>
-      <a:lvl5pPr marL="2438339" algn="l" defTabSz="1219170" rtl="0" eaLnBrk="1" latinLnBrk="0" hangingPunct="1">
-        <a:defRPr sz="2400" kern="1200">
+      <a:lvl5pPr marL="1828800" algn="l" defTabSz="914400" rtl="0" eaLnBrk="1" latinLnBrk="0" hangingPunct="1">
+        <a:defRPr sz="1800" kern="1200">
           <a:solidFill>
             <a:schemeClr val="tx1"/>
           </a:solidFill>
@@ -2911,8 +2909,8 @@
           <a:cs typeface="+mn-cs"/>
         </a:defRPr>
       </a:lvl5pPr>
-      <a:lvl6pPr marL="3047924" algn="l" defTabSz="1219170" rtl="0" eaLnBrk="1" latinLnBrk="0" hangingPunct="1">
-        <a:defRPr sz="2400" kern="1200">
+      <a:lvl6pPr marL="2286000" algn="l" defTabSz="914400" rtl="0" eaLnBrk="1" latinLnBrk="0" hangingPunct="1">
+        <a:defRPr sz="1800" kern="1200">
           <a:solidFill>
             <a:schemeClr val="tx1"/>
           </a:solidFill>
@@ -2921,8 +2919,8 @@
           <a:cs typeface="+mn-cs"/>
         </a:defRPr>
       </a:lvl6pPr>
-      <a:lvl7pPr marL="3657509" algn="l" defTabSz="1219170" rtl="0" eaLnBrk="1" latinLnBrk="0" hangingPunct="1">
-        <a:defRPr sz="2400" kern="1200">
+      <a:lvl7pPr marL="2743200" algn="l" defTabSz="914400" rtl="0" eaLnBrk="1" latinLnBrk="0" hangingPunct="1">
+        <a:defRPr sz="1800" kern="1200">
           <a:solidFill>
             <a:schemeClr val="tx1"/>
           </a:solidFill>
@@ -2931,8 +2929,8 @@
           <a:cs typeface="+mn-cs"/>
         </a:defRPr>
       </a:lvl7pPr>
-      <a:lvl8pPr marL="4267093" algn="l" defTabSz="1219170" rtl="0" eaLnBrk="1" latinLnBrk="0" hangingPunct="1">
-        <a:defRPr sz="2400" kern="1200">
+      <a:lvl8pPr marL="3200400" algn="l" defTabSz="914400" rtl="0" eaLnBrk="1" latinLnBrk="0" hangingPunct="1">
+        <a:defRPr sz="1800" kern="1200">
           <a:solidFill>
             <a:schemeClr val="tx1"/>
           </a:solidFill>
@@ -2941,8 +2939,8 @@
           <a:cs typeface="+mn-cs"/>
         </a:defRPr>
       </a:lvl8pPr>
-      <a:lvl9pPr marL="4876678" algn="l" defTabSz="1219170" rtl="0" eaLnBrk="1" latinLnBrk="0" hangingPunct="1">
-        <a:defRPr sz="2400" kern="1200">
+      <a:lvl9pPr marL="3657600" algn="l" defTabSz="914400" rtl="0" eaLnBrk="1" latinLnBrk="0" hangingPunct="1">
+        <a:defRPr sz="1800" kern="1200">
           <a:solidFill>
             <a:schemeClr val="tx1"/>
           </a:solidFill>
@@ -2987,8 +2985,8 @@
         </p:nvGrpSpPr>
         <p:grpSpPr>
           <a:xfrm>
-            <a:off x="372637" y="299580"/>
-            <a:ext cx="2889547" cy="8621948"/>
+            <a:off x="226419" y="278296"/>
+            <a:ext cx="2242145" cy="6347791"/>
             <a:chOff x="440430" y="261026"/>
             <a:chExt cx="2381885" cy="8621948"/>
           </a:xfrm>
@@ -3076,8 +3074,8 @@
         </p:nvSpPr>
         <p:spPr>
           <a:xfrm>
-            <a:off x="438366" y="3496775"/>
-            <a:ext cx="2663179" cy="1348574"/>
+            <a:off x="226418" y="2999176"/>
+            <a:ext cx="2227440" cy="1220462"/>
           </a:xfrm>
           <a:prstGeom prst="rect">
             <a:avLst/>
@@ -3097,17 +3095,34 @@
               <a:defRPr/>
             </a:pPr>
             <a:r>
-              <a:rPr lang="es-MX" sz="1400" b="1" dirty="0">
+              <a:rPr lang="es-MX" sz="1000" b="1" dirty="0">
                 <a:solidFill>
                   <a:schemeClr val="bg1"/>
                 </a:solidFill>
                 <a:latin typeface="Montserrat" pitchFamily="2" charset="0"/>
               </a:rPr>
-              <a:t>Formación Académica</a:t>
-            </a:r>
-          </a:p>
-          <a:p>
-            <a:pPr marL="171450" indent="-171450">
+              <a:t>Formación</a:t>
+            </a:r>
+          </a:p>
+          <a:p>
+            <a:pPr algn="ctr">
+              <a:lnSpc>
+                <a:spcPct val="150000"/>
+              </a:lnSpc>
+              <a:defRPr/>
+            </a:pPr>
+            <a:r>
+              <a:rPr lang="es-MX" sz="1000" b="1" dirty="0">
+                <a:solidFill>
+                  <a:schemeClr val="bg1"/>
+                </a:solidFill>
+                <a:latin typeface="Montserrat" pitchFamily="2" charset="0"/>
+              </a:rPr>
+              <a:t>Académica</a:t>
+            </a:r>
+          </a:p>
+          <a:p>
+            <a:pPr marL="96441" indent="-96441">
               <a:lnSpc>
                 <a:spcPct val="150000"/>
               </a:lnSpc>
@@ -3115,8 +3130,24 @@
               <a:buChar char="•"/>
               <a:defRPr/>
             </a:pPr>
-            <a:r>
-              <a:rPr lang="es-MX" sz="1400" b="1" dirty="0">
+            <a:endParaRPr lang="es-MX" sz="1000" b="1" dirty="0">
+              <a:solidFill>
+                <a:schemeClr val="bg1"/>
+              </a:solidFill>
+              <a:latin typeface="Montserrat" pitchFamily="2" charset="0"/>
+            </a:endParaRPr>
+          </a:p>
+          <a:p>
+            <a:pPr marL="96441" indent="-96441">
+              <a:lnSpc>
+                <a:spcPct val="150000"/>
+              </a:lnSpc>
+              <a:buFont typeface="Arial" panose="020B0604020202020204" pitchFamily="34" charset="0"/>
+              <a:buChar char="•"/>
+              <a:defRPr/>
+            </a:pPr>
+            <a:r>
+              <a:rPr lang="es-MX" sz="1000" b="1" dirty="0">
                 <a:solidFill>
                   <a:schemeClr val="bg1"/>
                 </a:solidFill>
@@ -3125,15 +3156,43 @@
               <a:t>Licenciatura </a:t>
             </a:r>
             <a:r>
-              <a:rPr lang="es-MX" sz="1400" dirty="0">
+              <a:rPr lang="es-MX" sz="1000" dirty="0">
                 <a:solidFill>
                   <a:schemeClr val="bg1"/>
                 </a:solidFill>
                 <a:latin typeface="Montserrat" pitchFamily="2" charset="0"/>
               </a:rPr>
-              <a:t>en Ciencias Políticas y Administración Pública</a:t>
-            </a:r>
-            <a:endParaRPr lang="es-MX" sz="1400" b="1" dirty="0">
+              <a:t>en Derecho.</a:t>
+            </a:r>
+          </a:p>
+          <a:p>
+            <a:pPr marL="96441" indent="-96441">
+              <a:lnSpc>
+                <a:spcPct val="150000"/>
+              </a:lnSpc>
+              <a:buFont typeface="Arial" panose="020B0604020202020204" pitchFamily="34" charset="0"/>
+              <a:buChar char="•"/>
+              <a:defRPr/>
+            </a:pPr>
+            <a:r>
+              <a:rPr lang="es-MX" sz="1000" b="1" dirty="0">
+                <a:solidFill>
+                  <a:schemeClr val="bg1"/>
+                </a:solidFill>
+                <a:latin typeface="Montserrat" pitchFamily="2" charset="0"/>
+              </a:rPr>
+              <a:t>Especialidad</a:t>
+            </a:r>
+            <a:r>
+              <a:rPr lang="es-MX" sz="1000" dirty="0">
+                <a:solidFill>
+                  <a:schemeClr val="bg1"/>
+                </a:solidFill>
+                <a:latin typeface="Montserrat" pitchFamily="2" charset="0"/>
+              </a:rPr>
+              <a:t> en Poligrafía.</a:t>
+            </a:r>
+            <a:endParaRPr lang="es-MX" sz="1000" b="1" dirty="0">
               <a:solidFill>
                 <a:schemeClr val="bg1"/>
               </a:solidFill>
@@ -3156,8 +3215,8 @@
         </p:nvSpPr>
         <p:spPr>
           <a:xfrm>
-            <a:off x="487794" y="5200078"/>
-            <a:ext cx="2663179" cy="1994905"/>
+            <a:off x="230076" y="4642425"/>
+            <a:ext cx="2250285" cy="1682127"/>
           </a:xfrm>
           <a:prstGeom prst="rect">
             <a:avLst/>
@@ -3177,7 +3236,7 @@
               <a:defRPr/>
             </a:pPr>
             <a:r>
-              <a:rPr lang="es-MX" sz="1400" b="1" dirty="0">
+              <a:rPr lang="es-MX" sz="1000" b="1" dirty="0">
                 <a:solidFill>
                   <a:schemeClr val="bg1"/>
                 </a:solidFill>
@@ -3185,6 +3244,20 @@
               </a:rPr>
               <a:t>Información de Contacto</a:t>
             </a:r>
+          </a:p>
+          <a:p>
+            <a:pPr algn="ctr">
+              <a:lnSpc>
+                <a:spcPct val="150000"/>
+              </a:lnSpc>
+              <a:defRPr/>
+            </a:pPr>
+            <a:endParaRPr lang="es-MX" sz="1000" b="1" dirty="0">
+              <a:solidFill>
+                <a:schemeClr val="bg1"/>
+              </a:solidFill>
+              <a:latin typeface="Montserrat" pitchFamily="2" charset="0"/>
+            </a:endParaRPr>
           </a:p>
           <a:p>
             <a:pPr algn="just">
@@ -3193,7 +3266,7 @@
               </a:lnSpc>
             </a:pPr>
             <a:r>
-              <a:rPr lang="es-MX" sz="1400" b="1" dirty="0">
+              <a:rPr lang="es-MX" sz="1000" b="1" dirty="0">
                 <a:solidFill>
                   <a:schemeClr val="bg1"/>
                 </a:solidFill>
@@ -3203,7 +3276,7 @@
               <a:t> </a:t>
             </a:r>
             <a:r>
-              <a:rPr lang="es-MX" sz="1400" b="1" dirty="0">
+              <a:rPr lang="es-MX" sz="1000" b="1" dirty="0">
                 <a:solidFill>
                   <a:schemeClr val="bg1"/>
                 </a:solidFill>
@@ -3213,18 +3286,18 @@
               <a:t>Personal: </a:t>
             </a:r>
             <a:r>
-              <a:rPr lang="es-MX" sz="1400" dirty="0">
+              <a:rPr lang="es-MX" sz="1000" dirty="0">
                 <a:solidFill>
                   <a:schemeClr val="bg1"/>
                 </a:solidFill>
                 <a:latin typeface="Montserrat" pitchFamily="2" charset="0"/>
                 <a:sym typeface="Wingdings"/>
               </a:rPr>
-              <a:t>5554030674</a:t>
-            </a:r>
-          </a:p>
-          <a:p>
-            <a:pPr marL="171450" indent="-171450" algn="just">
+              <a:t>5641647043</a:t>
+            </a:r>
+          </a:p>
+          <a:p>
+            <a:pPr marL="96441" indent="-96441" algn="just">
               <a:lnSpc>
                 <a:spcPct val="150000"/>
               </a:lnSpc>
@@ -3232,7 +3305,7 @@
               <a:buChar char="("/>
             </a:pPr>
             <a:r>
-              <a:rPr lang="es-MX" sz="1400" b="1" dirty="0">
+              <a:rPr lang="es-MX" sz="1000" b="1" dirty="0">
                 <a:solidFill>
                   <a:schemeClr val="bg1"/>
                 </a:solidFill>
@@ -3242,18 +3315,18 @@
               <a:t>Trabajo: </a:t>
             </a:r>
             <a:r>
-              <a:rPr lang="es-MX" sz="1400" dirty="0">
+              <a:rPr lang="es-MX" sz="1000" dirty="0">
                 <a:solidFill>
                   <a:schemeClr val="bg1"/>
                 </a:solidFill>
                 <a:latin typeface="Montserrat" pitchFamily="2" charset="0"/>
                 <a:sym typeface="Wingdings"/>
               </a:rPr>
-              <a:t>25810100 </a:t>
-            </a:r>
-          </a:p>
-          <a:p>
-            <a:pPr marL="171450" indent="-171450" algn="just">
+              <a:t>25810100</a:t>
+            </a:r>
+          </a:p>
+          <a:p>
+            <a:pPr marL="96441" indent="-96441" algn="just">
               <a:lnSpc>
                 <a:spcPct val="150000"/>
               </a:lnSpc>
@@ -3261,7 +3334,7 @@
               <a:buChar char="("/>
             </a:pPr>
             <a:r>
-              <a:rPr lang="es-MX" sz="1400" dirty="0">
+              <a:rPr lang="es-MX" sz="1000" dirty="0">
                 <a:solidFill>
                   <a:schemeClr val="bg1"/>
                 </a:solidFill>
@@ -3272,7 +3345,7 @@
             </a:r>
           </a:p>
           <a:p>
-            <a:pPr marL="171450" indent="-171450" algn="just">
+            <a:pPr marL="96441" indent="-96441" algn="just">
               <a:lnSpc>
                 <a:spcPct val="150000"/>
               </a:lnSpc>
@@ -3280,7 +3353,7 @@
               <a:buChar char="*"/>
             </a:pPr>
             <a:r>
-              <a:rPr lang="es-MX" sz="1400" b="1" dirty="0">
+              <a:rPr lang="es-MX" sz="1000" b="1" dirty="0">
                 <a:solidFill>
                   <a:schemeClr val="bg1"/>
                 </a:solidFill>
@@ -3297,7 +3370,7 @@
               </a:lnSpc>
             </a:pPr>
             <a:r>
-              <a:rPr lang="es-MX" sz="1400" b="1" dirty="0">
+              <a:rPr lang="es-MX" sz="1000" b="1" dirty="0">
                 <a:solidFill>
                   <a:schemeClr val="bg1"/>
                 </a:solidFill>
@@ -3311,10 +3384,10 @@
                   </a:extLst>
                 </a:hlinkClick>
               </a:rPr>
-              <a:t>malonso@inami.gob.mx</a:t>
-            </a:r>
-            <a:r>
-              <a:rPr lang="es-MX" sz="1400" b="1" dirty="0">
+              <a:t>jmagana@inami.gob.mx</a:t>
+            </a:r>
+            <a:r>
+              <a:rPr lang="es-MX" sz="1000" b="1" dirty="0">
                 <a:solidFill>
                   <a:schemeClr val="bg1"/>
                 </a:solidFill>
@@ -3340,8 +3413,8 @@
         </p:nvSpPr>
         <p:spPr>
           <a:xfrm>
-            <a:off x="3266127" y="791645"/>
-            <a:ext cx="12928087" cy="7968207"/>
+            <a:off x="2584174" y="848330"/>
+            <a:ext cx="6566387" cy="5513945"/>
           </a:xfrm>
           <a:prstGeom prst="rect">
             <a:avLst/>
@@ -3368,7 +3441,7 @@
               </a:lnSpc>
             </a:pPr>
             <a:r>
-              <a:rPr lang="es-MX" sz="3600" b="1" dirty="0">
+              <a:rPr lang="es-MX" sz="2000" b="1" dirty="0">
                 <a:solidFill>
                   <a:srgbClr val="DEC9A7"/>
                 </a:solidFill>
@@ -3376,14 +3449,7 @@
               </a:rPr>
               <a:t>TRAYECTORIA INM</a:t>
             </a:r>
-          </a:p>
-          <a:p>
-            <a:pPr>
-              <a:lnSpc>
-                <a:spcPct val="150000"/>
-              </a:lnSpc>
-            </a:pPr>
-            <a:endParaRPr lang="es-MX" sz="1200" b="1" dirty="0">
+            <a:endParaRPr lang="es-MX" sz="1000" b="1" dirty="0">
               <a:solidFill>
                 <a:srgbClr val="DEC9A7"/>
               </a:solidFill>
@@ -3391,13 +3457,13 @@
             </a:endParaRPr>
           </a:p>
           <a:p>
-            <a:pPr>
+            <a:pPr algn="just">
               <a:lnSpc>
                 <a:spcPct val="150000"/>
               </a:lnSpc>
             </a:pPr>
             <a:r>
-              <a:rPr lang="es-MX" sz="1600" b="1" dirty="0">
+              <a:rPr lang="es-MX" sz="1000" b="1" dirty="0">
                 <a:solidFill>
                   <a:srgbClr val="660033"/>
                 </a:solidFill>
@@ -3407,7 +3473,7 @@
             </a:r>
           </a:p>
           <a:p>
-            <a:pPr marL="171450" indent="-171450" algn="just">
+            <a:pPr marL="96441" indent="-96441" algn="just">
               <a:lnSpc>
                 <a:spcPct val="150000"/>
               </a:lnSpc>
@@ -3415,13 +3481,13 @@
               <a:buChar char="§"/>
             </a:pPr>
             <a:r>
-              <a:rPr lang="es-MX" sz="1600" b="1" dirty="0">
+              <a:rPr lang="es-MX" sz="1000" b="1" dirty="0">
                 <a:solidFill>
                   <a:srgbClr val="660033"/>
                 </a:solidFill>
                 <a:latin typeface="Montserrat" pitchFamily="2" charset="0"/>
               </a:rPr>
-              <a:t>Oficina de Representación en la Ciudad de México</a:t>
+              <a:t>Oficina de Representación en la Ciudad de México.</a:t>
             </a:r>
           </a:p>
           <a:p>
@@ -3431,26 +3497,57 @@
               </a:lnSpc>
             </a:pPr>
             <a:r>
-              <a:rPr lang="es-MX" sz="1600" b="1" dirty="0">
+              <a:rPr lang="es-MX" sz="1000" b="1" dirty="0">
                 <a:solidFill>
                   <a:srgbClr val="660033"/>
                 </a:solidFill>
                 <a:latin typeface="Montserrat" pitchFamily="2" charset="0"/>
               </a:rPr>
-              <a:t>     06/06/2023 - a la fecha: </a:t>
-            </a:r>
-            <a:r>
-              <a:rPr lang="es-MX" sz="1600" dirty="0">
+              <a:t>     16/06/2025- a la fecha:  </a:t>
+            </a:r>
+            <a:r>
+              <a:rPr lang="es-MX" sz="1000" dirty="0">
                 <a:solidFill>
                   <a:srgbClr val="660033"/>
                 </a:solidFill>
                 <a:latin typeface="Montserrat" pitchFamily="2" charset="0"/>
               </a:rPr>
-              <a:t>Titular de la Oficina de  Representación.</a:t>
-            </a:r>
-          </a:p>
-          <a:p>
-            <a:pPr marL="171450" indent="-171450" algn="just">
+              <a:t>Titular de la Oficina de Representación.</a:t>
+            </a:r>
+            <a:endParaRPr lang="es-MX" sz="1000" b="1" dirty="0">
+              <a:solidFill>
+                <a:srgbClr val="660033"/>
+              </a:solidFill>
+              <a:latin typeface="Montserrat" pitchFamily="2" charset="0"/>
+            </a:endParaRPr>
+          </a:p>
+          <a:p>
+            <a:pPr algn="just">
+              <a:lnSpc>
+                <a:spcPct val="150000"/>
+              </a:lnSpc>
+            </a:pPr>
+            <a:r>
+              <a:rPr lang="es-MX" sz="1000" b="1" dirty="0">
+                <a:solidFill>
+                  <a:srgbClr val="660033"/>
+                </a:solidFill>
+                <a:latin typeface="Montserrat" pitchFamily="2" charset="0"/>
+              </a:rPr>
+              <a:t>     01/06/2025- 15/06/2025: </a:t>
+            </a:r>
+            <a:r>
+              <a:rPr lang="es-MX" sz="1000" dirty="0">
+                <a:solidFill>
+                  <a:srgbClr val="660033"/>
+                </a:solidFill>
+                <a:latin typeface="Montserrat" pitchFamily="2" charset="0"/>
+              </a:rPr>
+              <a:t>Encargado de la Oficina de Representación.</a:t>
+            </a:r>
+          </a:p>
+          <a:p>
+            <a:pPr marL="96441" indent="-96441" algn="just">
               <a:lnSpc>
                 <a:spcPct val="150000"/>
               </a:lnSpc>
@@ -3458,47 +3555,13 @@
               <a:buChar char="§"/>
             </a:pPr>
             <a:r>
-              <a:rPr lang="es-MX" sz="1600" b="1" dirty="0">
+              <a:rPr lang="es-MX" sz="1000" b="1" dirty="0">
                 <a:solidFill>
                   <a:srgbClr val="660033"/>
                 </a:solidFill>
                 <a:latin typeface="Montserrat" pitchFamily="2" charset="0"/>
               </a:rPr>
-              <a:t>Dirección General de Regulación y Archivo Migratorio</a:t>
-            </a:r>
-          </a:p>
-          <a:p>
-            <a:pPr marL="182563" indent="-182563" algn="just">
-              <a:lnSpc>
-                <a:spcPct val="150000"/>
-              </a:lnSpc>
-            </a:pPr>
-            <a:r>
-              <a:rPr lang="es-MX" sz="1600" b="1" dirty="0">
-                <a:solidFill>
-                  <a:srgbClr val="DEC9A7"/>
-                </a:solidFill>
-                <a:latin typeface="Montserrat" pitchFamily="2" charset="0"/>
-              </a:rPr>
-              <a:t>     </a:t>
-            </a:r>
-            <a:r>
-              <a:rPr lang="es-MX" sz="1600" b="1" dirty="0">
-                <a:solidFill>
-                  <a:srgbClr val="660033"/>
-                </a:solidFill>
-                <a:latin typeface="Montserrat" pitchFamily="2" charset="0"/>
-              </a:rPr>
-              <a:t>01/08/2019 – 05/06/2023: </a:t>
-            </a:r>
-            <a:r>
-              <a:rPr lang="es-MX" sz="1600" dirty="0">
-                <a:solidFill>
-                  <a:srgbClr val="660033"/>
-                </a:solidFill>
-                <a:latin typeface="Montserrat" pitchFamily="2" charset="0"/>
-              </a:rPr>
-              <a:t>Directora de Atención y Difusión  Migratoria.</a:t>
+              <a:t>Secretario Particular del Comisionado.</a:t>
             </a:r>
           </a:p>
           <a:p>
@@ -3507,7 +3570,16 @@
                 <a:spcPct val="150000"/>
               </a:lnSpc>
             </a:pPr>
-            <a:endParaRPr lang="es-MX" sz="1600" b="1" dirty="0">
+            <a:r>
+              <a:rPr lang="es-MX" sz="1000" b="1" dirty="0">
+                <a:solidFill>
+                  <a:srgbClr val="660033"/>
+                </a:solidFill>
+                <a:latin typeface="Montserrat" pitchFamily="2" charset="0"/>
+              </a:rPr>
+              <a:t>     01/07/2019- 30/04/2025.</a:t>
+            </a:r>
+            <a:endParaRPr lang="es-MX" sz="700" b="1" dirty="0">
               <a:solidFill>
                 <a:srgbClr val="DEC9A7"/>
               </a:solidFill>
@@ -3520,21 +3592,8 @@
                 <a:spcPct val="150000"/>
               </a:lnSpc>
             </a:pPr>
-            <a:endParaRPr lang="es-MX" sz="1100" b="1" dirty="0">
-              <a:solidFill>
-                <a:srgbClr val="DEC9A7"/>
-              </a:solidFill>
-              <a:latin typeface="Montserrat" pitchFamily="2" charset="0"/>
-            </a:endParaRPr>
-          </a:p>
-          <a:p>
-            <a:pPr>
-              <a:lnSpc>
-                <a:spcPct val="150000"/>
-              </a:lnSpc>
-            </a:pPr>
-            <a:r>
-              <a:rPr lang="es-MX" sz="3600" b="1" dirty="0">
+            <a:r>
+              <a:rPr lang="es-MX" sz="2000" b="1" dirty="0">
                 <a:solidFill>
                   <a:srgbClr val="DEC9A7"/>
                 </a:solidFill>
@@ -3542,13 +3601,6 @@
               </a:rPr>
               <a:t>CARRERA PROFESIONAL</a:t>
             </a:r>
-          </a:p>
-          <a:p>
-            <a:pPr>
-              <a:lnSpc>
-                <a:spcPct val="150000"/>
-              </a:lnSpc>
-            </a:pPr>
             <a:endParaRPr lang="es-MX" sz="800" b="1" dirty="0">
               <a:solidFill>
                 <a:srgbClr val="DEC9A7"/>
@@ -3557,23 +3609,36 @@
             </a:endParaRPr>
           </a:p>
           <a:p>
+            <a:pPr>
+              <a:lnSpc>
+                <a:spcPct val="150000"/>
+              </a:lnSpc>
+            </a:pPr>
+            <a:endParaRPr lang="es-MX" sz="600" b="1" dirty="0">
+              <a:solidFill>
+                <a:srgbClr val="DEC9A7"/>
+              </a:solidFill>
+              <a:latin typeface="Montserrat" pitchFamily="2" charset="0"/>
+            </a:endParaRPr>
+          </a:p>
+          <a:p>
             <a:pPr algn="just">
               <a:lnSpc>
                 <a:spcPct val="150000"/>
               </a:lnSpc>
             </a:pPr>
             <a:r>
-              <a:rPr lang="es-MX" sz="1600" b="1" dirty="0">
+              <a:rPr lang="es-MX" sz="1000" b="1" dirty="0">
                 <a:solidFill>
                   <a:srgbClr val="660033"/>
                 </a:solidFill>
                 <a:latin typeface="Montserrat" pitchFamily="2" charset="0"/>
               </a:rPr>
-              <a:t>Cuenta con una amplia experiencia de más de 30 años en la Administración Pública, ocupando los siguientes cargos, entre otros:</a:t>
-            </a:r>
-          </a:p>
-          <a:p>
-            <a:pPr marL="171450" indent="-171450" algn="just">
+              <a:t>Cuenta con una amplia experiencia de más de 18 años en la Administración Pública, ocupando los siguientes cargos:</a:t>
+            </a:r>
+          </a:p>
+          <a:p>
+            <a:pPr marL="96441" indent="-96441" algn="just">
               <a:lnSpc>
                 <a:spcPct val="150000"/>
               </a:lnSpc>
@@ -3581,26 +3646,26 @@
               <a:buChar char="•"/>
             </a:pPr>
             <a:r>
-              <a:rPr lang="es-MX" sz="1600" b="1" dirty="0">
+              <a:rPr lang="es-MX" sz="1000" b="1" dirty="0">
                 <a:solidFill>
                   <a:srgbClr val="660033"/>
                 </a:solidFill>
                 <a:latin typeface="Montserrat" pitchFamily="2" charset="0"/>
               </a:rPr>
-              <a:t>Órgano Administrativo Desconcentrado Prevención y Readaptación Social</a:t>
-            </a:r>
-            <a:r>
-              <a:rPr lang="es-MX" sz="1600" dirty="0">
+              <a:t>Centros Federales de Readaptación Social: </a:t>
+            </a:r>
+            <a:r>
+              <a:rPr lang="es-MX" sz="1000" dirty="0">
                 <a:solidFill>
                   <a:srgbClr val="660033"/>
                 </a:solidFill>
                 <a:latin typeface="Montserrat" pitchFamily="2" charset="0"/>
               </a:rPr>
-              <a:t>: Directora Administrativa PRS;</a:t>
-            </a:r>
-          </a:p>
-          <a:p>
-            <a:pPr marL="171450" indent="-171450" algn="just">
+              <a:t>Secretario Particular del Coordinador General.</a:t>
+            </a:r>
+          </a:p>
+          <a:p>
+            <a:pPr marL="96441" indent="-96441" algn="just">
               <a:lnSpc>
                 <a:spcPct val="150000"/>
               </a:lnSpc>
@@ -3608,26 +3673,26 @@
               <a:buChar char="•"/>
             </a:pPr>
             <a:r>
-              <a:rPr lang="es-MX" sz="1600" b="1" dirty="0">
+              <a:rPr lang="es-MX" sz="1000" b="1" dirty="0">
                 <a:solidFill>
                   <a:srgbClr val="660033"/>
                 </a:solidFill>
                 <a:latin typeface="Montserrat" pitchFamily="2" charset="0"/>
               </a:rPr>
-              <a:t>Cámara de Diputados: </a:t>
-            </a:r>
-            <a:r>
-              <a:rPr lang="es-MX" sz="1600" dirty="0">
+              <a:t>Gobierno del Estado de Quintana Roo: </a:t>
+            </a:r>
+            <a:r>
+              <a:rPr lang="es-MX" sz="1000" dirty="0">
                 <a:solidFill>
                   <a:srgbClr val="660033"/>
                 </a:solidFill>
                 <a:latin typeface="Montserrat" pitchFamily="2" charset="0"/>
               </a:rPr>
-              <a:t>Consultora Parlamentaria;</a:t>
-            </a:r>
-          </a:p>
-          <a:p>
-            <a:pPr marL="171450" indent="-171450" algn="just">
+              <a:t>Director de Giras Zona Norte, Ejecutivo Estatal.</a:t>
+            </a:r>
+          </a:p>
+          <a:p>
+            <a:pPr marL="96441" indent="-96441" algn="just">
               <a:lnSpc>
                 <a:spcPct val="150000"/>
               </a:lnSpc>
@@ -3635,26 +3700,26 @@
               <a:buChar char="•"/>
             </a:pPr>
             <a:r>
-              <a:rPr lang="es-MX" sz="1600" b="1" dirty="0">
+              <a:rPr lang="es-MX" sz="1000" b="1" dirty="0">
                 <a:solidFill>
                   <a:srgbClr val="660033"/>
                 </a:solidFill>
                 <a:latin typeface="Montserrat" pitchFamily="2" charset="0"/>
               </a:rPr>
-              <a:t>Delegación Tlalpan, Ciudad de México: </a:t>
-            </a:r>
-            <a:r>
-              <a:rPr lang="es-MX" sz="1600" dirty="0">
+              <a:t>Estado Mayor Presidencial (EMP): </a:t>
+            </a:r>
+            <a:r>
+              <a:rPr lang="es-MX" sz="1000" dirty="0">
                 <a:solidFill>
                   <a:srgbClr val="660033"/>
                 </a:solidFill>
                 <a:latin typeface="Montserrat" pitchFamily="2" charset="0"/>
               </a:rPr>
-              <a:t>Directora General de Desarrollo Económico;</a:t>
-            </a:r>
-          </a:p>
-          <a:p>
-            <a:pPr marL="171450" indent="-171450" algn="just">
+              <a:t>Coordinador de Seguridad en Secretaría Particular.</a:t>
+            </a:r>
+          </a:p>
+          <a:p>
+            <a:pPr marL="96441" indent="-96441" algn="just">
               <a:lnSpc>
                 <a:spcPct val="150000"/>
               </a:lnSpc>
@@ -3662,26 +3727,44 @@
               <a:buChar char="•"/>
             </a:pPr>
             <a:r>
-              <a:rPr lang="es-MX" sz="1600" b="1" dirty="0">
+              <a:rPr lang="es-MX" sz="1000" b="1" dirty="0">
                 <a:solidFill>
                   <a:srgbClr val="660033"/>
                 </a:solidFill>
                 <a:latin typeface="Montserrat" pitchFamily="2" charset="0"/>
               </a:rPr>
-              <a:t>Secretaría de Desarrollo Económico, Ciudad de México: </a:t>
-            </a:r>
-            <a:r>
-              <a:rPr lang="es-MX" sz="1600" dirty="0">
+              <a:t>Unidad de Seguridad y Confianza del Estado Mayor Presidencial: </a:t>
+            </a:r>
+            <a:r>
+              <a:rPr lang="es-MX" sz="1000" dirty="0">
                 <a:solidFill>
                   <a:srgbClr val="660033"/>
                 </a:solidFill>
                 <a:latin typeface="Montserrat" pitchFamily="2" charset="0"/>
               </a:rPr>
-              <a:t>Directora General del Fideicomiso Fondo para el Desarrollo Social de la Ciudad de México (FONDESO);</a:t>
-            </a:r>
-          </a:p>
-          <a:p>
-            <a:pPr marL="171450" indent="-171450" algn="just">
+              <a:t>Evaluador </a:t>
+            </a:r>
+            <a:r>
+              <a:rPr lang="es-MX" sz="1000" dirty="0" err="1">
+                <a:solidFill>
+                  <a:srgbClr val="660033"/>
+                </a:solidFill>
+                <a:latin typeface="Montserrat" pitchFamily="2" charset="0"/>
+              </a:rPr>
+              <a:t>Poligrafista</a:t>
+            </a:r>
+            <a:r>
+              <a:rPr lang="es-MX" sz="1000" dirty="0">
+                <a:solidFill>
+                  <a:srgbClr val="660033"/>
+                </a:solidFill>
+                <a:latin typeface="Montserrat" pitchFamily="2" charset="0"/>
+              </a:rPr>
+              <a:t> y Jefe de Poligrafía.</a:t>
+            </a:r>
+          </a:p>
+          <a:p>
+            <a:pPr marL="96441" indent="-96441" algn="just">
               <a:lnSpc>
                 <a:spcPct val="150000"/>
               </a:lnSpc>
@@ -3689,22 +3772,121 @@
               <a:buChar char="•"/>
             </a:pPr>
             <a:r>
-              <a:rPr lang="es-MX" sz="1600" b="1" dirty="0">
+              <a:rPr lang="es-MX" sz="1000" b="1" dirty="0">
                 <a:solidFill>
                   <a:srgbClr val="660033"/>
                 </a:solidFill>
                 <a:latin typeface="Montserrat" pitchFamily="2" charset="0"/>
               </a:rPr>
-              <a:t>Secretaría de Transporte y Vialidad, Ciudad de México: </a:t>
-            </a:r>
-            <a:r>
-              <a:rPr lang="es-MX" sz="1600" dirty="0">
+              <a:t>S- 3 del Estado Mayor Presidencial (EMP): </a:t>
+            </a:r>
+            <a:r>
+              <a:rPr lang="es-MX" sz="1000" dirty="0">
                 <a:solidFill>
                   <a:srgbClr val="660033"/>
                 </a:solidFill>
                 <a:latin typeface="Montserrat" pitchFamily="2" charset="0"/>
               </a:rPr>
-              <a:t>Directora Técnica de la Dirección General del Servicio de Transporte Público Individual de Pasajeros.</a:t>
+              <a:t>Oficial de Protocolo.</a:t>
+            </a:r>
+          </a:p>
+          <a:p>
+            <a:pPr marL="96441" indent="-96441" algn="just">
+              <a:lnSpc>
+                <a:spcPct val="150000"/>
+              </a:lnSpc>
+              <a:buFont typeface="Arial" panose="020B0604020202020204" pitchFamily="34" charset="0"/>
+              <a:buChar char="•"/>
+            </a:pPr>
+            <a:r>
+              <a:rPr lang="es-MX" sz="1000" b="1" dirty="0">
+                <a:solidFill>
+                  <a:srgbClr val="660033"/>
+                </a:solidFill>
+                <a:latin typeface="Montserrat" pitchFamily="2" charset="0"/>
+              </a:rPr>
+              <a:t>Estado Mayor Presidencial (EMP): </a:t>
+            </a:r>
+            <a:r>
+              <a:rPr lang="es-MX" sz="1000" dirty="0">
+                <a:solidFill>
+                  <a:srgbClr val="660033"/>
+                </a:solidFill>
+                <a:latin typeface="Montserrat" pitchFamily="2" charset="0"/>
+              </a:rPr>
+              <a:t>Ayudante Militar del Presidente de la República.</a:t>
+            </a:r>
+          </a:p>
+          <a:p>
+            <a:pPr marL="96441" indent="-96441" algn="just">
+              <a:lnSpc>
+                <a:spcPct val="150000"/>
+              </a:lnSpc>
+              <a:buFont typeface="Arial" panose="020B0604020202020204" pitchFamily="34" charset="0"/>
+              <a:buChar char="•"/>
+            </a:pPr>
+            <a:r>
+              <a:rPr lang="es-MX" sz="1000" b="1" dirty="0">
+                <a:solidFill>
+                  <a:srgbClr val="660033"/>
+                </a:solidFill>
+                <a:latin typeface="Montserrat" pitchFamily="2" charset="0"/>
+              </a:rPr>
+              <a:t>S- 2 del Estado Mayor Presidencial (EMP): </a:t>
+            </a:r>
+            <a:r>
+              <a:rPr lang="es-MX" sz="1000" dirty="0">
+                <a:solidFill>
+                  <a:srgbClr val="660033"/>
+                </a:solidFill>
+                <a:latin typeface="Montserrat" pitchFamily="2" charset="0"/>
+              </a:rPr>
+              <a:t>Oficial de Búsqueda y Análisis de Información.</a:t>
+            </a:r>
+          </a:p>
+          <a:p>
+            <a:pPr marL="96441" indent="-96441" algn="just">
+              <a:lnSpc>
+                <a:spcPct val="150000"/>
+              </a:lnSpc>
+              <a:buFont typeface="Arial" panose="020B0604020202020204" pitchFamily="34" charset="0"/>
+              <a:buChar char="•"/>
+            </a:pPr>
+            <a:r>
+              <a:rPr lang="es-MX" sz="1000" b="1" dirty="0">
+                <a:solidFill>
+                  <a:srgbClr val="660033"/>
+                </a:solidFill>
+                <a:latin typeface="Montserrat" pitchFamily="2" charset="0"/>
+              </a:rPr>
+              <a:t>Ejercito Mexicano Unidades en que prestó servicios:</a:t>
+            </a:r>
+            <a:r>
+              <a:rPr lang="es-MX" sz="1000" dirty="0">
+                <a:solidFill>
+                  <a:srgbClr val="660033"/>
+                </a:solidFill>
+                <a:latin typeface="Montserrat" pitchFamily="2" charset="0"/>
+              </a:rPr>
+              <a:t> 5/o. Regimiento de Artillería, 1/</a:t>
+            </a:r>
+            <a:r>
+              <a:rPr lang="es-MX" sz="1000" dirty="0" err="1">
+                <a:solidFill>
+                  <a:srgbClr val="660033"/>
+                </a:solidFill>
+                <a:latin typeface="Montserrat" pitchFamily="2" charset="0"/>
+              </a:rPr>
+              <a:t>er</a:t>
+            </a:r>
+            <a:r>
+              <a:rPr lang="es-MX" sz="1000" dirty="0">
+                <a:solidFill>
+                  <a:srgbClr val="660033"/>
+                </a:solidFill>
+                <a:latin typeface="Montserrat" pitchFamily="2" charset="0"/>
+              </a:rPr>
+              <a:t>. Batallón de Transportes del Cuerpo de Guardias Presidenciales, 2/o. Batallón de Policía Militar del Cuerpo de Guardias Presidenciales.</a:t>
             </a:r>
           </a:p>
         </p:txBody>
@@ -3736,8 +3918,8 @@
         </p:blipFill>
         <p:spPr>
           <a:xfrm>
-            <a:off x="9421963" y="6856"/>
-            <a:ext cx="6837980" cy="1019567"/>
+            <a:off x="5539027" y="143802"/>
+            <a:ext cx="3604973" cy="570045"/>
           </a:xfrm>
           <a:prstGeom prst="rect">
             <a:avLst/>
@@ -3745,53 +3927,6 @@
           <a:ln>
             <a:noFill/>
           </a:ln>
-        </p:spPr>
-      </p:pic>
-      <p:pic>
-        <p:nvPicPr>
-          <p:cNvPr id="14" name="Picture 2" descr="W:\SDCO_Zona Sur\SUR\CV TITULARES DE LAS O R\SEMBLANZAS CURRICULARES TOR -JUNIO 2024\FOTOS\CDMX -MONICARAMÓN ALONSO.jpg">
-            <a:extLst>
-              <a:ext uri="{FF2B5EF4-FFF2-40B4-BE49-F238E27FC236}">
-                <a16:creationId xmlns:a16="http://schemas.microsoft.com/office/drawing/2014/main" id="{DC36C556-F65A-4B3D-964B-8FF89E0B569B}"/>
-              </a:ext>
-            </a:extLst>
-          </p:cNvPr>
-          <p:cNvPicPr>
-            <a:picLocks noChangeAspect="1" noChangeArrowheads="1"/>
-          </p:cNvPicPr>
-          <p:nvPr/>
-        </p:nvPicPr>
-        <p:blipFill>
-          <a:blip r:embed="rId5" cstate="print">
-            <a:extLst>
-              <a:ext uri="{28A0092B-C50C-407E-A947-70E740481C1C}">
-                <a14:useLocalDpi xmlns:a14="http://schemas.microsoft.com/office/drawing/2010/main" val="0"/>
-              </a:ext>
-            </a:extLst>
-          </a:blip>
-          <a:srcRect/>
-          <a:stretch>
-            <a:fillRect/>
-          </a:stretch>
-        </p:blipFill>
-        <p:spPr bwMode="auto">
-          <a:xfrm>
-            <a:off x="1140550" y="1365690"/>
-            <a:ext cx="1168426" cy="1218002"/>
-          </a:xfrm>
-          <a:prstGeom prst="rect">
-            <a:avLst/>
-          </a:prstGeom>
-          <a:noFill/>
-          <a:extLst>
-            <a:ext uri="{909E8E84-426E-40DD-AFC4-6F175D3DCCD1}">
-              <a14:hiddenFill xmlns:a14="http://schemas.microsoft.com/office/drawing/2010/main">
-                <a:solidFill>
-                  <a:srgbClr val="FFFFFF"/>
-                </a:solidFill>
-              </a14:hiddenFill>
-            </a:ext>
-          </a:extLst>
         </p:spPr>
       </p:pic>
       <p:grpSp>
@@ -3808,10 +3943,10 @@
         </p:nvGrpSpPr>
         <p:grpSpPr>
           <a:xfrm>
-            <a:off x="691486" y="552297"/>
-            <a:ext cx="2069771" cy="2811102"/>
-            <a:chOff x="-1405374" y="2755628"/>
-            <a:chExt cx="2069771" cy="2811102"/>
+            <a:off x="226419" y="507824"/>
+            <a:ext cx="2227442" cy="2270436"/>
+            <a:chOff x="-1889139" y="2285799"/>
+            <a:chExt cx="4150951" cy="4036329"/>
           </a:xfrm>
         </p:grpSpPr>
         <p:sp>
@@ -3828,8 +3963,8 @@
           </p:nvSpPr>
           <p:spPr>
             <a:xfrm>
-              <a:off x="-1405374" y="2755628"/>
-              <a:ext cx="2066554" cy="707886"/>
+              <a:off x="-1889139" y="2285799"/>
+              <a:ext cx="4150951" cy="437726"/>
             </a:xfrm>
             <a:prstGeom prst="rect">
               <a:avLst/>
@@ -3846,7 +3981,7 @@
             <a:p>
               <a:pPr algn="ctr"/>
               <a:r>
-                <a:rPr lang="es-ES" sz="2000" b="1" dirty="0">
+                <a:rPr lang="es-MX" sz="1000" b="1" dirty="0">
                   <a:solidFill>
                     <a:schemeClr val="bg1"/>
                   </a:solidFill>
@@ -3854,7 +3989,7 @@
                 </a:rPr>
                 <a:t>CIUDAD DE MÉXICO</a:t>
               </a:r>
-              <a:endParaRPr lang="es-MX" sz="2000" dirty="0">
+              <a:endParaRPr lang="es-MX" sz="1000" dirty="0">
                 <a:solidFill>
                   <a:schemeClr val="bg1"/>
                 </a:solidFill>
@@ -3877,8 +4012,8 @@
           </p:nvSpPr>
           <p:spPr>
             <a:xfrm>
-              <a:off x="-1368403" y="4920399"/>
-              <a:ext cx="2032800" cy="646331"/>
+              <a:off x="-1889137" y="5610822"/>
+              <a:ext cx="3959893" cy="711306"/>
             </a:xfrm>
             <a:prstGeom prst="rect">
               <a:avLst/>
@@ -3895,15 +4030,27 @@
             <a:p>
               <a:pPr algn="ctr"/>
               <a:r>
-                <a:rPr lang="es-ES" b="1" dirty="0">
+                <a:rPr lang="es-ES" sz="1000" b="1" dirty="0">
                   <a:solidFill>
                     <a:schemeClr val="bg1"/>
                   </a:solidFill>
                   <a:latin typeface="Montserrat" pitchFamily="2" charset="0"/>
                 </a:rPr>
-                <a:t>Lic. Mónica Ramón Alonso</a:t>
+                <a:t>JULIO CÉSAR </a:t>
               </a:r>
-              <a:endParaRPr lang="es-MX" dirty="0">
+            </a:p>
+            <a:p>
+              <a:pPr algn="ctr"/>
+              <a:r>
+                <a:rPr lang="es-ES" sz="1000" b="1" dirty="0">
+                  <a:solidFill>
+                    <a:schemeClr val="bg1"/>
+                  </a:solidFill>
+                  <a:latin typeface="Montserrat" pitchFamily="2" charset="0"/>
+                </a:rPr>
+                <a:t>MAGAÑA SEGURA</a:t>
+              </a:r>
+              <a:endParaRPr lang="es-MX" sz="1000" dirty="0">
                 <a:solidFill>
                   <a:schemeClr val="bg1"/>
                 </a:solidFill>
@@ -3913,6 +4060,36 @@
           </p:txBody>
         </p:sp>
       </p:grpSp>
+      <p:pic>
+        <p:nvPicPr>
+          <p:cNvPr id="3" name="Imagen 2">
+            <a:extLst>
+              <a:ext uri="{FF2B5EF4-FFF2-40B4-BE49-F238E27FC236}">
+                <a16:creationId xmlns:a16="http://schemas.microsoft.com/office/drawing/2014/main" id="{9D8914A9-87CB-4AC7-848D-85A1662B83E5}"/>
+              </a:ext>
+            </a:extLst>
+          </p:cNvPr>
+          <p:cNvPicPr>
+            <a:picLocks noChangeAspect="1"/>
+          </p:cNvPicPr>
+          <p:nvPr/>
+        </p:nvPicPr>
+        <p:blipFill>
+          <a:blip r:embed="rId5"/>
+          <a:stretch>
+            <a:fillRect/>
+          </a:stretch>
+        </p:blipFill>
+        <p:spPr>
+          <a:xfrm>
+            <a:off x="761961" y="1127207"/>
+            <a:ext cx="1053836" cy="1137839"/>
+          </a:xfrm>
+          <a:prstGeom prst="rect">
+            <a:avLst/>
+          </a:prstGeom>
+        </p:spPr>
+      </p:pic>
     </p:spTree>
     <p:extLst>
       <p:ext uri="{BB962C8B-B14F-4D97-AF65-F5344CB8AC3E}">
@@ -3927,9 +4104,9 @@
 </file>
 
 <file path=ppt/theme/theme1.xml><?xml version="1.0" encoding="utf-8"?>
-<a:theme xmlns:a="http://schemas.openxmlformats.org/drawingml/2006/main" name="Office 2013 - Tema de 2022">
+<a:theme xmlns:a="http://schemas.openxmlformats.org/drawingml/2006/main" name="Tema de Office">
   <a:themeElements>
-    <a:clrScheme name="Office 2013 - Tema de 2022">
+    <a:clrScheme name="Tema de Office">
       <a:dk1>
         <a:sysClr val="windowText" lastClr="000000"/>
       </a:dk1>
@@ -3967,7 +4144,7 @@
         <a:srgbClr val="954F72"/>
       </a:folHlink>
     </a:clrScheme>
-    <a:fontScheme name="Office 2013 - Tema de 2022">
+    <a:fontScheme name="Tema de Office">
       <a:majorFont>
         <a:latin typeface="Calibri Light" panose="020F0302020204030204"/>
         <a:ea typeface=""/>
@@ -4039,7 +4216,7 @@
         <a:font script="Geor" typeface="Sylfaen"/>
       </a:minorFont>
     </a:fontScheme>
-    <a:fmtScheme name="Office 2013 - Tema de 2022">
+    <a:fmtScheme name="Tema de Office">
       <a:fillStyleLst>
         <a:solidFill>
           <a:schemeClr val="phClr"/>
@@ -4181,7 +4358,7 @@
   <a:extraClrSchemeLst/>
   <a:extLst>
     <a:ext uri="{05A4C25C-085E-4340-85A3-A5531E510DB2}">
-      <thm15:themeFamily xmlns:thm15="http://schemas.microsoft.com/office/thememl/2012/main" name="Office 2013 - 2022 Theme" id="{62F939B6-93AF-4DB8-9C6B-D6C7DFDC589F}" vid="{4A3C46E8-61CC-4603-A589-7422A47A8E4A}"/>
+      <thm15:themeFamily xmlns:thm15="http://schemas.microsoft.com/office/thememl/2012/main" name="Office Theme" id="{62F939B6-93AF-4DB8-9C6B-D6C7DFDC589F}" vid="{4A3C46E8-61CC-4603-A589-7422A47A8E4A}"/>
     </a:ext>
   </a:extLst>
 </a:theme>
